--- a/presentation/Capstone-Story-Presentation.pptx
+++ b/presentation/Capstone-Story-Presentation.pptx
@@ -14,20 +14,20 @@
     <p:sldId id="259" r:id="rId8"/>
     <p:sldId id="260" r:id="rId9"/>
     <p:sldId id="261" r:id="rId10"/>
-    <p:sldId id="262" r:id="rId11"/>
-    <p:sldId id="263" r:id="rId12"/>
-    <p:sldId id="264" r:id="rId13"/>
-    <p:sldId id="265" r:id="rId14"/>
-    <p:sldId id="266" r:id="rId15"/>
-    <p:sldId id="267" r:id="rId16"/>
-    <p:sldId id="268" r:id="rId17"/>
-    <p:sldId id="269" r:id="rId18"/>
-    <p:sldId id="270" r:id="rId19"/>
-    <p:sldId id="271" r:id="rId20"/>
-    <p:sldId id="272" r:id="rId21"/>
-    <p:sldId id="273" r:id="rId22"/>
-    <p:sldId id="274" r:id="rId23"/>
-    <p:sldId id="275" r:id="rId24"/>
+    <p:sldId id="274" r:id="rId11"/>
+    <p:sldId id="275" r:id="rId12"/>
+    <p:sldId id="262" r:id="rId13"/>
+    <p:sldId id="263" r:id="rId14"/>
+    <p:sldId id="264" r:id="rId15"/>
+    <p:sldId id="265" r:id="rId16"/>
+    <p:sldId id="266" r:id="rId17"/>
+    <p:sldId id="267" r:id="rId18"/>
+    <p:sldId id="268" r:id="rId19"/>
+    <p:sldId id="269" r:id="rId20"/>
+    <p:sldId id="270" r:id="rId21"/>
+    <p:sldId id="271" r:id="rId22"/>
+    <p:sldId id="272" r:id="rId23"/>
+    <p:sldId id="273" r:id="rId24"/>
   </p:sldIdLst>
   <p:sldSz cx="12192000" cy="6858000"/>
   <p:notesSz cx="6858000" cy="1857375"/>
@@ -11767,6 +11767,359 @@
         <p:cNvPr id="1" name="">
           <a:extLst>
             <a:ext uri="{FF2B5EF4-FFF2-40B4-BE49-F238E27FC236}">
+              <a16:creationId xmlns:a16="http://schemas.microsoft.com/office/drawing/2014/main" id="{D707BF14-48B4-018D-63EE-DF24A5A8CF9A}"/>
+            </a:ext>
+          </a:extLst>
+        </p:cNvPr>
+        <p:cNvGrpSpPr/>
+        <p:nvPr/>
+      </p:nvGrpSpPr>
+      <p:grpSpPr>
+        <a:xfrm>
+          <a:off x="0" y="0"/>
+          <a:ext cx="0" cy="0"/>
+          <a:chOff x="0" y="0"/>
+          <a:chExt cx="0" cy="0"/>
+        </a:xfrm>
+      </p:grpSpPr>
+      <p:sp>
+        <p:nvSpPr>
+          <p:cNvPr id="2" name="Title 1">
+            <a:extLst>
+              <a:ext uri="{FF2B5EF4-FFF2-40B4-BE49-F238E27FC236}">
+                <a16:creationId xmlns:a16="http://schemas.microsoft.com/office/drawing/2014/main" id="{94444DA4-C4B2-2A92-8A96-C527D8D026A7}"/>
+              </a:ext>
+            </a:extLst>
+          </p:cNvPr>
+          <p:cNvSpPr>
+            <a:spLocks noGrp="1"/>
+          </p:cNvSpPr>
+          <p:nvPr>
+            <p:ph type="title"/>
+          </p:nvPr>
+        </p:nvSpPr>
+        <p:spPr>
+          <a:xfrm>
+            <a:off x="838200" y="365126"/>
+            <a:ext cx="10515600" cy="1081838"/>
+          </a:xfrm>
+        </p:spPr>
+        <p:txBody>
+          <a:bodyPr anchor="ctr">
+            <a:normAutofit fontScale="90000"/>
+          </a:bodyPr>
+          <a:lstStyle/>
+          <a:p>
+            <a:r>
+              <a:rPr lang="en-US" dirty="0"/>
+              <a:t>PROGRAMMING LANGUAGE TRENDS - FINDINGS &amp; IMPLICATIONS</a:t>
+            </a:r>
+          </a:p>
+        </p:txBody>
+      </p:sp>
+      <p:sp>
+        <p:nvSpPr>
+          <p:cNvPr id="4" name="Content Placeholder 3">
+            <a:extLst>
+              <a:ext uri="{FF2B5EF4-FFF2-40B4-BE49-F238E27FC236}">
+                <a16:creationId xmlns:a16="http://schemas.microsoft.com/office/drawing/2014/main" id="{D2166E7F-5223-7C98-EBC0-E8FA35940F98}"/>
+              </a:ext>
+            </a:extLst>
+          </p:cNvPr>
+          <p:cNvSpPr>
+            <a:spLocks noGrp="1"/>
+          </p:cNvSpPr>
+          <p:nvPr>
+            <p:ph sz="half" idx="1"/>
+          </p:nvPr>
+        </p:nvSpPr>
+        <p:spPr>
+          <a:xfrm>
+            <a:off x="838200" y="1600200"/>
+            <a:ext cx="5181600" cy="4572000"/>
+          </a:xfrm>
+        </p:spPr>
+        <p:txBody>
+          <a:bodyPr>
+            <a:normAutofit/>
+          </a:bodyPr>
+          <a:lstStyle/>
+          <a:p>
+            <a:pPr marL="0" indent="0">
+              <a:buNone/>
+            </a:pPr>
+            <a:r>
+              <a:rPr lang="en-US" dirty="0"/>
+              <a:t>Implications:-</a:t>
+            </a:r>
+          </a:p>
+          <a:p>
+            <a:r>
+              <a:rPr lang="en-US" dirty="0"/>
+              <a:t>Continue prioritizing JavaScript/TypeScript tooling and training</a:t>
+            </a:r>
+          </a:p>
+          <a:p>
+            <a:r>
+              <a:rPr lang="en-US" dirty="0"/>
+              <a:t>Invest in Go and Rust skill-building to stay ahead of demand</a:t>
+            </a:r>
+          </a:p>
+          <a:p>
+            <a:r>
+              <a:rPr lang="en-US" dirty="0"/>
+              <a:t>Monitor Java's declining future interest when planning legacy system staffing</a:t>
+            </a:r>
+          </a:p>
+        </p:txBody>
+      </p:sp>
+      <p:graphicFrame>
+        <p:nvGraphicFramePr>
+          <p:cNvPr id="6" name="Content Placeholder 2">
+            <a:extLst>
+              <a:ext uri="{FF2B5EF4-FFF2-40B4-BE49-F238E27FC236}">
+                <a16:creationId xmlns:a16="http://schemas.microsoft.com/office/drawing/2014/main" id="{96C81F0B-BAA7-2EA4-F238-228210EAE3FB}"/>
+              </a:ext>
+            </a:extLst>
+          </p:cNvPr>
+          <p:cNvGraphicFramePr>
+            <a:graphicFrameLocks noGrp="1"/>
+          </p:cNvGraphicFramePr>
+          <p:nvPr>
+            <p:ph sz="half" idx="2"/>
+            <p:extLst>
+              <p:ext uri="{D42A27DB-BD31-4B8C-83A1-F6EECF244321}">
+                <p14:modId xmlns:p14="http://schemas.microsoft.com/office/powerpoint/2010/main" val="2142551381"/>
+              </p:ext>
+            </p:extLst>
+          </p:nvPr>
+        </p:nvGraphicFramePr>
+        <p:xfrm>
+          <a:off x="6172200" y="1600200"/>
+          <a:ext cx="5181600" cy="4572000"/>
+        </p:xfrm>
+        <a:graphic>
+          <a:graphicData uri="http://schemas.openxmlformats.org/drawingml/2006/diagram">
+            <dgm:relIds xmlns:dgm="http://schemas.openxmlformats.org/drawingml/2006/diagram" xmlns:r="http://schemas.openxmlformats.org/officeDocument/2006/relationships" r:dm="rId3" r:lo="rId4" r:qs="rId5" r:cs="rId6"/>
+          </a:graphicData>
+        </a:graphic>
+      </p:graphicFrame>
+    </p:spTree>
+    <p:custDataLst>
+      <p:tags r:id="rId1"/>
+    </p:custDataLst>
+    <p:extLst>
+      <p:ext uri="{BB962C8B-B14F-4D97-AF65-F5344CB8AC3E}">
+        <p14:creationId xmlns:p14="http://schemas.microsoft.com/office/powerpoint/2010/main" val="3701288749"/>
+      </p:ext>
+    </p:extLst>
+  </p:cSld>
+  <p:clrMapOvr>
+    <a:masterClrMapping/>
+  </p:clrMapOvr>
+</p:sld>
+</file>
+
+<file path=ppt/slides/slide11.xml><?xml version="1.0" encoding="utf-8"?>
+<p:sld xmlns:a="http://schemas.openxmlformats.org/drawingml/2006/main" xmlns:r="http://schemas.openxmlformats.org/officeDocument/2006/relationships" xmlns:p="http://schemas.openxmlformats.org/presentationml/2006/main">
+  <p:cSld>
+    <p:spTree>
+      <p:nvGrpSpPr>
+        <p:cNvPr id="1" name="">
+          <a:extLst>
+            <a:ext uri="{FF2B5EF4-FFF2-40B4-BE49-F238E27FC236}">
+              <a16:creationId xmlns:a16="http://schemas.microsoft.com/office/drawing/2014/main" id="{13AA0F35-C02C-0C12-3664-049CAC5AFA69}"/>
+            </a:ext>
+          </a:extLst>
+        </p:cNvPr>
+        <p:cNvGrpSpPr/>
+        <p:nvPr/>
+      </p:nvGrpSpPr>
+      <p:grpSpPr>
+        <a:xfrm>
+          <a:off x="0" y="0"/>
+          <a:ext cx="0" cy="0"/>
+          <a:chOff x="0" y="0"/>
+          <a:chExt cx="0" cy="0"/>
+        </a:xfrm>
+      </p:grpSpPr>
+      <p:sp>
+        <p:nvSpPr>
+          <p:cNvPr id="2" name="Title 1">
+            <a:extLst>
+              <a:ext uri="{FF2B5EF4-FFF2-40B4-BE49-F238E27FC236}">
+                <a16:creationId xmlns:a16="http://schemas.microsoft.com/office/drawing/2014/main" id="{580B430B-2D6C-26E3-5D00-4D061A250E06}"/>
+              </a:ext>
+            </a:extLst>
+          </p:cNvPr>
+          <p:cNvSpPr>
+            <a:spLocks noGrp="1"/>
+          </p:cNvSpPr>
+          <p:nvPr>
+            <p:ph type="title"/>
+          </p:nvPr>
+        </p:nvSpPr>
+        <p:spPr>
+          <a:xfrm>
+            <a:off x="862584" y="428768"/>
+            <a:ext cx="10515600" cy="1325563"/>
+          </a:xfrm>
+        </p:spPr>
+        <p:txBody>
+          <a:bodyPr/>
+          <a:lstStyle/>
+          <a:p>
+            <a:r>
+              <a:rPr lang="en-US" dirty="0"/>
+              <a:t>DATABASE TRENDS</a:t>
+            </a:r>
+          </a:p>
+        </p:txBody>
+      </p:sp>
+      <p:sp>
+        <p:nvSpPr>
+          <p:cNvPr id="3" name="Content Placeholder 2">
+            <a:extLst>
+              <a:ext uri="{FF2B5EF4-FFF2-40B4-BE49-F238E27FC236}">
+                <a16:creationId xmlns:a16="http://schemas.microsoft.com/office/drawing/2014/main" id="{6C2B3FA5-2985-EAFB-8885-6820D4058AF4}"/>
+              </a:ext>
+            </a:extLst>
+          </p:cNvPr>
+          <p:cNvSpPr>
+            <a:spLocks noGrp="1"/>
+          </p:cNvSpPr>
+          <p:nvPr>
+            <p:ph sz="half" idx="1"/>
+          </p:nvPr>
+        </p:nvSpPr>
+        <p:spPr>
+          <a:xfrm>
+            <a:off x="862584" y="1574655"/>
+            <a:ext cx="2228642" cy="501939"/>
+          </a:xfrm>
+        </p:spPr>
+        <p:txBody>
+          <a:bodyPr/>
+          <a:lstStyle/>
+          <a:p>
+            <a:pPr marL="0" indent="0">
+              <a:buNone/>
+            </a:pPr>
+            <a:r>
+              <a:rPr lang="en-US" dirty="0"/>
+              <a:t>Current Year</a:t>
+            </a:r>
+          </a:p>
+        </p:txBody>
+      </p:sp>
+      <p:sp>
+        <p:nvSpPr>
+          <p:cNvPr id="4" name="Content Placeholder 3">
+            <a:extLst>
+              <a:ext uri="{FF2B5EF4-FFF2-40B4-BE49-F238E27FC236}">
+                <a16:creationId xmlns:a16="http://schemas.microsoft.com/office/drawing/2014/main" id="{30E0AA0B-A66B-F896-65D9-69DDA700D8E7}"/>
+              </a:ext>
+            </a:extLst>
+          </p:cNvPr>
+          <p:cNvSpPr>
+            <a:spLocks noGrp="1"/>
+          </p:cNvSpPr>
+          <p:nvPr>
+            <p:ph sz="half" idx="2"/>
+          </p:nvPr>
+        </p:nvSpPr>
+        <p:spPr>
+          <a:xfrm>
+            <a:off x="6172200" y="1574654"/>
+            <a:ext cx="1758142" cy="501939"/>
+          </a:xfrm>
+        </p:spPr>
+        <p:txBody>
+          <a:bodyPr/>
+          <a:lstStyle/>
+          <a:p>
+            <a:pPr marL="0" indent="0">
+              <a:buNone/>
+            </a:pPr>
+            <a:r>
+              <a:rPr lang="en-US" dirty="0"/>
+              <a:t>Next Year</a:t>
+            </a:r>
+          </a:p>
+        </p:txBody>
+      </p:sp>
+      <p:pic>
+        <p:nvPicPr>
+          <p:cNvPr id="5" name="Picture 4" descr="db_current.png"/>
+          <p:cNvPicPr>
+            <a:picLocks noChangeAspect="1"/>
+          </p:cNvPicPr>
+          <p:nvPr/>
+        </p:nvPicPr>
+        <p:blipFill>
+          <a:blip r:embed="rId3"/>
+          <a:stretch>
+            <a:fillRect/>
+          </a:stretch>
+        </p:blipFill>
+        <p:spPr>
+          <a:xfrm>
+            <a:off x="862584" y="2076593"/>
+            <a:ext cx="5233416" cy="3670301"/>
+          </a:xfrm>
+          <a:prstGeom prst="rect">
+            <a:avLst/>
+          </a:prstGeom>
+        </p:spPr>
+      </p:pic>
+      <p:pic>
+        <p:nvPicPr>
+          <p:cNvPr id="6" name="Picture 5" descr="db_future.png"/>
+          <p:cNvPicPr>
+            <a:picLocks noChangeAspect="1"/>
+          </p:cNvPicPr>
+          <p:nvPr/>
+        </p:nvPicPr>
+        <p:blipFill>
+          <a:blip r:embed="rId4"/>
+          <a:stretch>
+            <a:fillRect/>
+          </a:stretch>
+        </p:blipFill>
+        <p:spPr>
+          <a:xfrm>
+            <a:off x="6096000" y="2076592"/>
+            <a:ext cx="5509846" cy="3670301"/>
+          </a:xfrm>
+          <a:prstGeom prst="rect">
+            <a:avLst/>
+          </a:prstGeom>
+        </p:spPr>
+      </p:pic>
+    </p:spTree>
+    <p:custDataLst>
+      <p:tags r:id="rId1"/>
+    </p:custDataLst>
+    <p:extLst>
+      <p:ext uri="{BB962C8B-B14F-4D97-AF65-F5344CB8AC3E}">
+        <p14:creationId xmlns:p14="http://schemas.microsoft.com/office/powerpoint/2010/main" val="1502887446"/>
+      </p:ext>
+    </p:extLst>
+  </p:cSld>
+  <p:clrMapOvr>
+    <a:masterClrMapping/>
+  </p:clrMapOvr>
+</p:sld>
+</file>
+
+<file path=ppt/slides/slide12.xml><?xml version="1.0" encoding="utf-8"?>
+<p:sld xmlns:a="http://schemas.openxmlformats.org/drawingml/2006/main" xmlns:r="http://schemas.openxmlformats.org/officeDocument/2006/relationships" xmlns:p="http://schemas.openxmlformats.org/presentationml/2006/main">
+  <p:cSld>
+    <p:spTree>
+      <p:nvGrpSpPr>
+        <p:cNvPr id="1" name="">
+          <a:extLst>
+            <a:ext uri="{FF2B5EF4-FFF2-40B4-BE49-F238E27FC236}">
               <a16:creationId xmlns:a16="http://schemas.microsoft.com/office/drawing/2014/main" id="{578A6A9C-70D0-119E-38BE-1738DA5AD3A0}"/>
             </a:ext>
           </a:extLst>
@@ -11928,7 +12281,7 @@
 </p:sld>
 </file>
 
-<file path=ppt/slides/slide11.xml><?xml version="1.0" encoding="utf-8"?>
+<file path=ppt/slides/slide13.xml><?xml version="1.0" encoding="utf-8"?>
 <p:sld xmlns:a="http://schemas.openxmlformats.org/drawingml/2006/main" xmlns:r="http://schemas.openxmlformats.org/officeDocument/2006/relationships" xmlns:p="http://schemas.openxmlformats.org/presentationml/2006/main">
   <p:cSld>
     <p:spTree>
@@ -12230,8 +12583,8 @@
         </p:nvSpPr>
         <p:spPr>
           <a:xfrm>
-            <a:off x="4829175" y="2828834"/>
-            <a:ext cx="6181725" cy="1200329"/>
+            <a:off x="4810125" y="2247809"/>
+            <a:ext cx="6181725" cy="3046988"/>
           </a:xfrm>
           <a:prstGeom prst="rect">
             <a:avLst/>
@@ -12245,12 +12598,22 @@
           <a:lstStyle/>
           <a:p>
             <a:r>
+              <a:rPr lang="en-US" sz="2400" dirty="0"/>
+              <a:t>An interactive IBM Cognos Analytics dashboard was built to explore developer survey trends across three tabs: Current Technology Usage, Future Technology Trends, and Demographics.</a:t>
+            </a:r>
+          </a:p>
+          <a:p>
+            <a:r>
               <a:rPr lang="en-US" sz="2400" b="1" dirty="0"/>
               <a:t>GitHub Repository:</a:t>
             </a:r>
             <a:r>
               <a:rPr lang="en-US" sz="2400" dirty="0"/>
-              <a:t> github.com/Gandhar1824/stack-overflow-developer-survey-analysis</a:t>
+              <a:t> </a:t>
+            </a:r>
+            <a:r>
+              <a:rPr lang="en-US" sz="2400" b="1" dirty="0"/>
+              <a:t>github.com/Gandhar1824/stack-overflow-developer-survey-analysis</a:t>
             </a:r>
           </a:p>
         </p:txBody>
@@ -12271,7 +12634,7 @@
 </p:sld>
 </file>
 
-<file path=ppt/slides/slide12.xml><?xml version="1.0" encoding="utf-8"?>
+<file path=ppt/slides/slide14.xml><?xml version="1.0" encoding="utf-8"?>
 <p:sld xmlns:a="http://schemas.openxmlformats.org/drawingml/2006/main" xmlns:r="http://schemas.openxmlformats.org/officeDocument/2006/relationships" xmlns:p="http://schemas.openxmlformats.org/presentationml/2006/main">
   <p:cSld>
     <p:spTree>
@@ -12369,7 +12732,7 @@
 </p:sld>
 </file>
 
-<file path=ppt/slides/slide13.xml><?xml version="1.0" encoding="utf-8"?>
+<file path=ppt/slides/slide15.xml><?xml version="1.0" encoding="utf-8"?>
 <p:sld xmlns:a="http://schemas.openxmlformats.org/drawingml/2006/main" xmlns:r="http://schemas.openxmlformats.org/officeDocument/2006/relationships" xmlns:p="http://schemas.openxmlformats.org/presentationml/2006/main">
   <p:cSld>
     <p:spTree>
@@ -12467,7 +12830,7 @@
 </p:sld>
 </file>
 
-<file path=ppt/slides/slide14.xml><?xml version="1.0" encoding="utf-8"?>
+<file path=ppt/slides/slide16.xml><?xml version="1.0" encoding="utf-8"?>
 <p:sld xmlns:a="http://schemas.openxmlformats.org/drawingml/2006/main" xmlns:r="http://schemas.openxmlformats.org/officeDocument/2006/relationships" xmlns:p="http://schemas.openxmlformats.org/presentationml/2006/main">
   <p:cSld>
     <p:spTree>
@@ -12566,7 +12929,7 @@
 </p:sld>
 </file>
 
-<file path=ppt/slides/slide15.xml><?xml version="1.0" encoding="utf-8"?>
+<file path=ppt/slides/slide17.xml><?xml version="1.0" encoding="utf-8"?>
 <p:sld xmlns:a="http://schemas.openxmlformats.org/drawingml/2006/main" xmlns:r="http://schemas.openxmlformats.org/officeDocument/2006/relationships" xmlns:p="http://schemas.openxmlformats.org/presentationml/2006/main">
   <p:cSld>
     <p:spTree>
@@ -12805,7 +13168,7 @@
 </p:sld>
 </file>
 
-<file path=ppt/slides/slide16.xml><?xml version="1.0" encoding="utf-8"?>
+<file path=ppt/slides/slide18.xml><?xml version="1.0" encoding="utf-8"?>
 <p:sld xmlns:a="http://schemas.openxmlformats.org/drawingml/2006/main" xmlns:r="http://schemas.openxmlformats.org/officeDocument/2006/relationships" xmlns:p="http://schemas.openxmlformats.org/presentationml/2006/main">
   <p:cSld>
     <p:spTree>
@@ -12972,7 +13335,7 @@
 </p:sld>
 </file>
 
-<file path=ppt/slides/slide17.xml><?xml version="1.0" encoding="utf-8"?>
+<file path=ppt/slides/slide19.xml><?xml version="1.0" encoding="utf-8"?>
 <p:sld xmlns:a="http://schemas.openxmlformats.org/drawingml/2006/main" xmlns:r="http://schemas.openxmlformats.org/officeDocument/2006/relationships" xmlns:p="http://schemas.openxmlformats.org/presentationml/2006/main">
   <p:cSld>
     <p:spTree>
@@ -13291,632 +13654,6 @@
     <p:extLst>
       <p:ext uri="{BB962C8B-B14F-4D97-AF65-F5344CB8AC3E}">
         <p14:creationId xmlns:p14="http://schemas.microsoft.com/office/powerpoint/2010/main" val="840378239"/>
-      </p:ext>
-    </p:extLst>
-  </p:cSld>
-  <p:clrMapOvr>
-    <a:masterClrMapping/>
-  </p:clrMapOvr>
-</p:sld>
-</file>
-
-<file path=ppt/slides/slide18.xml><?xml version="1.0" encoding="utf-8"?>
-<p:sld xmlns:a="http://schemas.openxmlformats.org/drawingml/2006/main" xmlns:r="http://schemas.openxmlformats.org/officeDocument/2006/relationships" xmlns:p="http://schemas.openxmlformats.org/presentationml/2006/main">
-  <p:cSld>
-    <p:spTree>
-      <p:nvGrpSpPr>
-        <p:cNvPr id="1" name="">
-          <a:extLst>
-            <a:ext uri="{FF2B5EF4-FFF2-40B4-BE49-F238E27FC236}">
-              <a16:creationId xmlns:a16="http://schemas.microsoft.com/office/drawing/2014/main" id="{BAD1598F-DBE3-7B78-D1F9-0BA7F7DC75BC}"/>
-            </a:ext>
-          </a:extLst>
-        </p:cNvPr>
-        <p:cNvGrpSpPr/>
-        <p:nvPr/>
-      </p:nvGrpSpPr>
-      <p:grpSpPr>
-        <a:xfrm>
-          <a:off x="0" y="0"/>
-          <a:ext cx="0" cy="0"/>
-          <a:chOff x="0" y="0"/>
-          <a:chExt cx="0" cy="0"/>
-        </a:xfrm>
-      </p:grpSpPr>
-      <p:sp>
-        <p:nvSpPr>
-          <p:cNvPr id="9" name="Title 1">
-            <a:extLst>
-              <a:ext uri="{FF2B5EF4-FFF2-40B4-BE49-F238E27FC236}">
-                <a16:creationId xmlns:a16="http://schemas.microsoft.com/office/drawing/2014/main" id="{34A3B939-6057-23B6-25B3-E33A2D205C2A}"/>
-              </a:ext>
-            </a:extLst>
-          </p:cNvPr>
-          <p:cNvSpPr>
-            <a:spLocks noGrp="1"/>
-          </p:cNvSpPr>
-          <p:nvPr>
-            <p:ph type="title"/>
-          </p:nvPr>
-        </p:nvSpPr>
-        <p:spPr>
-          <a:xfrm>
-            <a:off x="838200" y="365125"/>
-            <a:ext cx="10515600" cy="1325563"/>
-          </a:xfrm>
-        </p:spPr>
-        <p:txBody>
-          <a:bodyPr anchor="ctr">
-            <a:normAutofit/>
-          </a:bodyPr>
-          <a:lstStyle/>
-          <a:p>
-            <a:r>
-              <a:rPr lang="en-US" dirty="0"/>
-              <a:t>APPENDIX</a:t>
-            </a:r>
-          </a:p>
-        </p:txBody>
-      </p:sp>
-      <p:sp>
-        <p:nvSpPr>
-          <p:cNvPr id="10" name="Content Placeholder 3">
-            <a:extLst>
-              <a:ext uri="{FF2B5EF4-FFF2-40B4-BE49-F238E27FC236}">
-                <a16:creationId xmlns:a16="http://schemas.microsoft.com/office/drawing/2014/main" id="{8E40FF55-AE57-CB43-454D-CEFBE080CE8E}"/>
-              </a:ext>
-            </a:extLst>
-          </p:cNvPr>
-          <p:cNvSpPr txBox="1">
-            <a:spLocks/>
-          </p:cNvSpPr>
-          <p:nvPr/>
-        </p:nvSpPr>
-        <p:spPr>
-          <a:xfrm>
-            <a:off x="4544291" y="1825625"/>
-            <a:ext cx="6809509" cy="700000"/>
-          </a:xfrm>
-          <a:prstGeom prst="rect">
-            <a:avLst/>
-          </a:prstGeom>
-        </p:spPr>
-        <p:txBody>
-          <a:bodyPr vert="horz" lIns="91440" tIns="45720" rIns="91440" bIns="45720" rtlCol="0">
-            <a:normAutofit fontScale="62500" lnSpcReduction="20000"/>
-          </a:bodyPr>
-          <a:lstStyle>
-            <a:lvl1pPr marL="228600" indent="-228600" algn="l" defTabSz="914400" rtl="0" eaLnBrk="1" latinLnBrk="0" hangingPunct="1">
-              <a:lnSpc>
-                <a:spcPct val="90000"/>
-              </a:lnSpc>
-              <a:spcBef>
-                <a:spcPts val="1000"/>
-              </a:spcBef>
-              <a:buFont typeface="Arial"/>
-              <a:buChar char="•"/>
-              <a:defRPr sz="2800" kern="1200">
-                <a:solidFill>
-                  <a:srgbClr val="262626"/>
-                </a:solidFill>
-                <a:latin typeface="IBM Plex Sans" panose="020B0503050203000203" pitchFamily="34" charset="0"/>
-                <a:ea typeface="+mn-ea"/>
-                <a:cs typeface="+mn-cs"/>
-              </a:defRPr>
-            </a:lvl1pPr>
-            <a:lvl2pPr marL="685800" indent="-228600" algn="l" defTabSz="914400" rtl="0" eaLnBrk="1" latinLnBrk="0" hangingPunct="1">
-              <a:lnSpc>
-                <a:spcPct val="90000"/>
-              </a:lnSpc>
-              <a:spcBef>
-                <a:spcPts val="500"/>
-              </a:spcBef>
-              <a:buFont typeface="Arial"/>
-              <a:buChar char="•"/>
-              <a:defRPr sz="2400" kern="1200">
-                <a:solidFill>
-                  <a:srgbClr val="262626"/>
-                </a:solidFill>
-                <a:latin typeface="IBM Plex Sans" panose="020B0503050203000203" pitchFamily="34" charset="0"/>
-                <a:ea typeface="+mn-ea"/>
-                <a:cs typeface="+mn-cs"/>
-              </a:defRPr>
-            </a:lvl2pPr>
-            <a:lvl3pPr marL="1143000" indent="-228600" algn="l" defTabSz="914400" rtl="0" eaLnBrk="1" latinLnBrk="0" hangingPunct="1">
-              <a:lnSpc>
-                <a:spcPct val="90000"/>
-              </a:lnSpc>
-              <a:spcBef>
-                <a:spcPts val="500"/>
-              </a:spcBef>
-              <a:buFont typeface="Arial"/>
-              <a:buChar char="•"/>
-              <a:defRPr sz="2000" kern="1200">
-                <a:solidFill>
-                  <a:srgbClr val="262626"/>
-                </a:solidFill>
-                <a:latin typeface="IBM Plex Sans" panose="020B0503050203000203" pitchFamily="34" charset="0"/>
-                <a:ea typeface="+mn-ea"/>
-                <a:cs typeface="+mn-cs"/>
-              </a:defRPr>
-            </a:lvl3pPr>
-            <a:lvl4pPr marL="1600200" indent="-228600" algn="l" defTabSz="914400" rtl="0" eaLnBrk="1" latinLnBrk="0" hangingPunct="1">
-              <a:lnSpc>
-                <a:spcPct val="90000"/>
-              </a:lnSpc>
-              <a:spcBef>
-                <a:spcPts val="500"/>
-              </a:spcBef>
-              <a:buFont typeface="Arial"/>
-              <a:buChar char="•"/>
-              <a:defRPr sz="1800" kern="1200">
-                <a:solidFill>
-                  <a:srgbClr val="525252"/>
-                </a:solidFill>
-                <a:latin typeface="IBM Plex Sans" panose="020B0503050203000203" pitchFamily="34" charset="0"/>
-                <a:ea typeface="+mn-ea"/>
-                <a:cs typeface="+mn-cs"/>
-              </a:defRPr>
-            </a:lvl4pPr>
-            <a:lvl5pPr marL="2057400" indent="-228600" algn="l" defTabSz="914400" rtl="0" eaLnBrk="1" latinLnBrk="0" hangingPunct="1">
-              <a:lnSpc>
-                <a:spcPct val="90000"/>
-              </a:lnSpc>
-              <a:spcBef>
-                <a:spcPts val="500"/>
-              </a:spcBef>
-              <a:buFont typeface="Arial"/>
-              <a:buChar char="•"/>
-              <a:defRPr sz="1800" kern="1200">
-                <a:solidFill>
-                  <a:srgbClr val="525252"/>
-                </a:solidFill>
-                <a:latin typeface="IBM Plex Sans" panose="020B0503050203000203" pitchFamily="34" charset="0"/>
-                <a:ea typeface="+mn-ea"/>
-                <a:cs typeface="+mn-cs"/>
-              </a:defRPr>
-            </a:lvl5pPr>
-            <a:lvl6pPr marL="2514600" indent="-228600" algn="l" defTabSz="914400" rtl="0" eaLnBrk="1" latinLnBrk="0" hangingPunct="1">
-              <a:lnSpc>
-                <a:spcPct val="90000"/>
-              </a:lnSpc>
-              <a:spcBef>
-                <a:spcPts val="500"/>
-              </a:spcBef>
-              <a:buFont typeface="Arial"/>
-              <a:buChar char="•"/>
-              <a:defRPr sz="1800" kern="1200">
-                <a:solidFill>
-                  <a:schemeClr val="tx1"/>
-                </a:solidFill>
-                <a:latin typeface="+mn-lt"/>
-                <a:ea typeface="+mn-ea"/>
-                <a:cs typeface="+mn-cs"/>
-              </a:defRPr>
-            </a:lvl6pPr>
-            <a:lvl7pPr marL="2971800" indent="-228600" algn="l" defTabSz="914400" rtl="0" eaLnBrk="1" latinLnBrk="0" hangingPunct="1">
-              <a:lnSpc>
-                <a:spcPct val="90000"/>
-              </a:lnSpc>
-              <a:spcBef>
-                <a:spcPts val="500"/>
-              </a:spcBef>
-              <a:buFont typeface="Arial"/>
-              <a:buChar char="•"/>
-              <a:defRPr sz="1800" kern="1200">
-                <a:solidFill>
-                  <a:schemeClr val="tx1"/>
-                </a:solidFill>
-                <a:latin typeface="+mn-lt"/>
-                <a:ea typeface="+mn-ea"/>
-                <a:cs typeface="+mn-cs"/>
-              </a:defRPr>
-            </a:lvl7pPr>
-            <a:lvl8pPr marL="3429000" indent="-228600" algn="l" defTabSz="914400" rtl="0" eaLnBrk="1" latinLnBrk="0" hangingPunct="1">
-              <a:lnSpc>
-                <a:spcPct val="90000"/>
-              </a:lnSpc>
-              <a:spcBef>
-                <a:spcPts val="500"/>
-              </a:spcBef>
-              <a:buFont typeface="Arial"/>
-              <a:buChar char="•"/>
-              <a:defRPr sz="1800" kern="1200">
-                <a:solidFill>
-                  <a:schemeClr val="tx1"/>
-                </a:solidFill>
-                <a:latin typeface="+mn-lt"/>
-                <a:ea typeface="+mn-ea"/>
-                <a:cs typeface="+mn-cs"/>
-              </a:defRPr>
-            </a:lvl8pPr>
-            <a:lvl9pPr marL="3886200" indent="-228600" algn="l" defTabSz="914400" rtl="0" eaLnBrk="1" latinLnBrk="0" hangingPunct="1">
-              <a:lnSpc>
-                <a:spcPct val="90000"/>
-              </a:lnSpc>
-              <a:spcBef>
-                <a:spcPts val="500"/>
-              </a:spcBef>
-              <a:buFont typeface="Arial"/>
-              <a:buChar char="•"/>
-              <a:defRPr sz="1800" kern="1200">
-                <a:solidFill>
-                  <a:schemeClr val="tx1"/>
-                </a:solidFill>
-                <a:latin typeface="+mn-lt"/>
-                <a:ea typeface="+mn-ea"/>
-                <a:cs typeface="+mn-cs"/>
-              </a:defRPr>
-            </a:lvl9pPr>
-          </a:lstStyle>
-          <a:p>
-            <a:r>
-              <a:rPr lang="en-US"/>
-              <a:t>Additional charts from the analysis: cloud platform usage and web framework usage, current vs. future interest.</a:t>
-            </a:r>
-            <a:endParaRPr lang="en-US" dirty="0"/>
-          </a:p>
-        </p:txBody>
-      </p:sp>
-      <p:pic>
-        <p:nvPicPr>
-          <p:cNvPr id="11" name="Picture 10" descr="platform_current.png"/>
-          <p:cNvPicPr>
-            <a:picLocks noChangeAspect="1"/>
-          </p:cNvPicPr>
-          <p:nvPr/>
-        </p:nvPicPr>
-        <p:blipFill>
-          <a:blip r:embed="rId3"/>
-          <a:stretch>
-            <a:fillRect/>
-          </a:stretch>
-        </p:blipFill>
-        <p:spPr>
-          <a:xfrm>
-            <a:off x="371789" y="1507253"/>
-            <a:ext cx="4172502" cy="2818941"/>
-          </a:xfrm>
-          <a:prstGeom prst="rect">
-            <a:avLst/>
-          </a:prstGeom>
-        </p:spPr>
-      </p:pic>
-      <p:pic>
-        <p:nvPicPr>
-          <p:cNvPr id="12" name="Picture 11" descr="webframe_current.png"/>
-          <p:cNvPicPr>
-            <a:picLocks noChangeAspect="1"/>
-          </p:cNvPicPr>
-          <p:nvPr/>
-        </p:nvPicPr>
-        <p:blipFill>
-          <a:blip r:embed="rId4"/>
-          <a:stretch>
-            <a:fillRect/>
-          </a:stretch>
-        </p:blipFill>
-        <p:spPr>
-          <a:xfrm>
-            <a:off x="5010702" y="2305278"/>
-            <a:ext cx="6809509" cy="4041831"/>
-          </a:xfrm>
-          <a:prstGeom prst="rect">
-            <a:avLst/>
-          </a:prstGeom>
-        </p:spPr>
-      </p:pic>
-    </p:spTree>
-    <p:custDataLst>
-      <p:tags r:id="rId1"/>
-    </p:custDataLst>
-    <p:extLst>
-      <p:ext uri="{BB962C8B-B14F-4D97-AF65-F5344CB8AC3E}">
-        <p14:creationId xmlns:p14="http://schemas.microsoft.com/office/powerpoint/2010/main" val="1860158657"/>
-      </p:ext>
-    </p:extLst>
-  </p:cSld>
-  <p:clrMapOvr>
-    <a:masterClrMapping/>
-  </p:clrMapOvr>
-</p:sld>
-</file>
-
-<file path=ppt/slides/slide19.xml><?xml version="1.0" encoding="utf-8"?>
-<p:sld xmlns:a="http://schemas.openxmlformats.org/drawingml/2006/main" xmlns:r="http://schemas.openxmlformats.org/officeDocument/2006/relationships" xmlns:p="http://schemas.openxmlformats.org/presentationml/2006/main">
-  <p:cSld>
-    <p:spTree>
-      <p:nvGrpSpPr>
-        <p:cNvPr id="1" name="">
-          <a:extLst>
-            <a:ext uri="{FF2B5EF4-FFF2-40B4-BE49-F238E27FC236}">
-              <a16:creationId xmlns:a16="http://schemas.microsoft.com/office/drawing/2014/main" id="{F1FC4E31-32FC-4A23-CEF9-98F0BB9F13E9}"/>
-            </a:ext>
-          </a:extLst>
-        </p:cNvPr>
-        <p:cNvGrpSpPr/>
-        <p:nvPr/>
-      </p:nvGrpSpPr>
-      <p:grpSpPr>
-        <a:xfrm>
-          <a:off x="0" y="0"/>
-          <a:ext cx="0" cy="0"/>
-          <a:chOff x="0" y="0"/>
-          <a:chExt cx="0" cy="0"/>
-        </a:xfrm>
-      </p:grpSpPr>
-      <p:sp>
-        <p:nvSpPr>
-          <p:cNvPr id="9" name="Title 1">
-            <a:extLst>
-              <a:ext uri="{FF2B5EF4-FFF2-40B4-BE49-F238E27FC236}">
-                <a16:creationId xmlns:a16="http://schemas.microsoft.com/office/drawing/2014/main" id="{8334EF5D-2E2A-7FE5-06C6-01ACAB1F420F}"/>
-              </a:ext>
-            </a:extLst>
-          </p:cNvPr>
-          <p:cNvSpPr>
-            <a:spLocks noGrp="1"/>
-          </p:cNvSpPr>
-          <p:nvPr>
-            <p:ph type="title"/>
-          </p:nvPr>
-        </p:nvSpPr>
-        <p:spPr>
-          <a:xfrm>
-            <a:off x="538248" y="383051"/>
-            <a:ext cx="5929053" cy="1325563"/>
-          </a:xfrm>
-        </p:spPr>
-        <p:txBody>
-          <a:bodyPr anchor="ctr">
-            <a:normAutofit/>
-          </a:bodyPr>
-          <a:lstStyle/>
-          <a:p>
-            <a:r>
-              <a:rPr lang="en-US" dirty="0"/>
-              <a:t> JOB POSTINGS</a:t>
-            </a:r>
-          </a:p>
-        </p:txBody>
-      </p:sp>
-      <p:sp>
-        <p:nvSpPr>
-          <p:cNvPr id="10" name="Content Placeholder 2">
-            <a:extLst>
-              <a:ext uri="{FF2B5EF4-FFF2-40B4-BE49-F238E27FC236}">
-                <a16:creationId xmlns:a16="http://schemas.microsoft.com/office/drawing/2014/main" id="{83F79416-0AFB-FC80-07E8-3CF2B4E7E798}"/>
-              </a:ext>
-            </a:extLst>
-          </p:cNvPr>
-          <p:cNvSpPr txBox="1">
-            <a:spLocks/>
-          </p:cNvSpPr>
-          <p:nvPr/>
-        </p:nvSpPr>
-        <p:spPr>
-          <a:xfrm>
-            <a:off x="914400" y="2191385"/>
-            <a:ext cx="10489276" cy="2862753"/>
-          </a:xfrm>
-          <a:prstGeom prst="rect">
-            <a:avLst/>
-          </a:prstGeom>
-        </p:spPr>
-        <p:txBody>
-          <a:bodyPr vert="horz" lIns="91440" tIns="45720" rIns="91440" bIns="45720" rtlCol="0">
-            <a:normAutofit/>
-          </a:bodyPr>
-          <a:lstStyle>
-            <a:lvl1pPr marL="228600" indent="-228600" algn="l" defTabSz="914400" rtl="0" eaLnBrk="1" latinLnBrk="0" hangingPunct="1">
-              <a:lnSpc>
-                <a:spcPct val="90000"/>
-              </a:lnSpc>
-              <a:spcBef>
-                <a:spcPts val="1000"/>
-              </a:spcBef>
-              <a:buFont typeface="Arial"/>
-              <a:buChar char="•"/>
-              <a:defRPr sz="2800" kern="1200">
-                <a:solidFill>
-                  <a:srgbClr val="262626"/>
-                </a:solidFill>
-                <a:latin typeface="IBM Plex Sans" panose="020B0503050203000203" pitchFamily="34" charset="0"/>
-                <a:ea typeface="+mn-ea"/>
-                <a:cs typeface="+mn-cs"/>
-              </a:defRPr>
-            </a:lvl1pPr>
-            <a:lvl2pPr marL="685800" indent="-228600" algn="l" defTabSz="914400" rtl="0" eaLnBrk="1" latinLnBrk="0" hangingPunct="1">
-              <a:lnSpc>
-                <a:spcPct val="90000"/>
-              </a:lnSpc>
-              <a:spcBef>
-                <a:spcPts val="500"/>
-              </a:spcBef>
-              <a:buFont typeface="Arial"/>
-              <a:buChar char="•"/>
-              <a:defRPr sz="2400" kern="1200">
-                <a:solidFill>
-                  <a:srgbClr val="262626"/>
-                </a:solidFill>
-                <a:latin typeface="IBM Plex Sans" panose="020B0503050203000203" pitchFamily="34" charset="0"/>
-                <a:ea typeface="+mn-ea"/>
-                <a:cs typeface="+mn-cs"/>
-              </a:defRPr>
-            </a:lvl2pPr>
-            <a:lvl3pPr marL="1143000" indent="-228600" algn="l" defTabSz="914400" rtl="0" eaLnBrk="1" latinLnBrk="0" hangingPunct="1">
-              <a:lnSpc>
-                <a:spcPct val="90000"/>
-              </a:lnSpc>
-              <a:spcBef>
-                <a:spcPts val="500"/>
-              </a:spcBef>
-              <a:buFont typeface="Arial"/>
-              <a:buChar char="•"/>
-              <a:defRPr sz="2000" kern="1200">
-                <a:solidFill>
-                  <a:srgbClr val="262626"/>
-                </a:solidFill>
-                <a:latin typeface="IBM Plex Sans" panose="020B0503050203000203" pitchFamily="34" charset="0"/>
-                <a:ea typeface="+mn-ea"/>
-                <a:cs typeface="+mn-cs"/>
-              </a:defRPr>
-            </a:lvl3pPr>
-            <a:lvl4pPr marL="1600200" indent="-228600" algn="l" defTabSz="914400" rtl="0" eaLnBrk="1" latinLnBrk="0" hangingPunct="1">
-              <a:lnSpc>
-                <a:spcPct val="90000"/>
-              </a:lnSpc>
-              <a:spcBef>
-                <a:spcPts val="500"/>
-              </a:spcBef>
-              <a:buFont typeface="Arial"/>
-              <a:buChar char="•"/>
-              <a:defRPr sz="1800" kern="1200">
-                <a:solidFill>
-                  <a:srgbClr val="525252"/>
-                </a:solidFill>
-                <a:latin typeface="IBM Plex Sans" panose="020B0503050203000203" pitchFamily="34" charset="0"/>
-                <a:ea typeface="+mn-ea"/>
-                <a:cs typeface="+mn-cs"/>
-              </a:defRPr>
-            </a:lvl4pPr>
-            <a:lvl5pPr marL="2057400" indent="-228600" algn="l" defTabSz="914400" rtl="0" eaLnBrk="1" latinLnBrk="0" hangingPunct="1">
-              <a:lnSpc>
-                <a:spcPct val="90000"/>
-              </a:lnSpc>
-              <a:spcBef>
-                <a:spcPts val="500"/>
-              </a:spcBef>
-              <a:buFont typeface="Arial"/>
-              <a:buChar char="•"/>
-              <a:defRPr sz="1800" kern="1200">
-                <a:solidFill>
-                  <a:srgbClr val="525252"/>
-                </a:solidFill>
-                <a:latin typeface="IBM Plex Sans" panose="020B0503050203000203" pitchFamily="34" charset="0"/>
-                <a:ea typeface="+mn-ea"/>
-                <a:cs typeface="+mn-cs"/>
-              </a:defRPr>
-            </a:lvl5pPr>
-            <a:lvl6pPr marL="2514600" indent="-228600" algn="l" defTabSz="914400" rtl="0" eaLnBrk="1" latinLnBrk="0" hangingPunct="1">
-              <a:lnSpc>
-                <a:spcPct val="90000"/>
-              </a:lnSpc>
-              <a:spcBef>
-                <a:spcPts val="500"/>
-              </a:spcBef>
-              <a:buFont typeface="Arial"/>
-              <a:buChar char="•"/>
-              <a:defRPr sz="1800" kern="1200">
-                <a:solidFill>
-                  <a:schemeClr val="tx1"/>
-                </a:solidFill>
-                <a:latin typeface="+mn-lt"/>
-                <a:ea typeface="+mn-ea"/>
-                <a:cs typeface="+mn-cs"/>
-              </a:defRPr>
-            </a:lvl6pPr>
-            <a:lvl7pPr marL="2971800" indent="-228600" algn="l" defTabSz="914400" rtl="0" eaLnBrk="1" latinLnBrk="0" hangingPunct="1">
-              <a:lnSpc>
-                <a:spcPct val="90000"/>
-              </a:lnSpc>
-              <a:spcBef>
-                <a:spcPts val="500"/>
-              </a:spcBef>
-              <a:buFont typeface="Arial"/>
-              <a:buChar char="•"/>
-              <a:defRPr sz="1800" kern="1200">
-                <a:solidFill>
-                  <a:schemeClr val="tx1"/>
-                </a:solidFill>
-                <a:latin typeface="+mn-lt"/>
-                <a:ea typeface="+mn-ea"/>
-                <a:cs typeface="+mn-cs"/>
-              </a:defRPr>
-            </a:lvl7pPr>
-            <a:lvl8pPr marL="3429000" indent="-228600" algn="l" defTabSz="914400" rtl="0" eaLnBrk="1" latinLnBrk="0" hangingPunct="1">
-              <a:lnSpc>
-                <a:spcPct val="90000"/>
-              </a:lnSpc>
-              <a:spcBef>
-                <a:spcPts val="500"/>
-              </a:spcBef>
-              <a:buFont typeface="Arial"/>
-              <a:buChar char="•"/>
-              <a:defRPr sz="1800" kern="1200">
-                <a:solidFill>
-                  <a:schemeClr val="tx1"/>
-                </a:solidFill>
-                <a:latin typeface="+mn-lt"/>
-                <a:ea typeface="+mn-ea"/>
-                <a:cs typeface="+mn-cs"/>
-              </a:defRPr>
-            </a:lvl8pPr>
-            <a:lvl9pPr marL="3886200" indent="-228600" algn="l" defTabSz="914400" rtl="0" eaLnBrk="1" latinLnBrk="0" hangingPunct="1">
-              <a:lnSpc>
-                <a:spcPct val="90000"/>
-              </a:lnSpc>
-              <a:spcBef>
-                <a:spcPts val="500"/>
-              </a:spcBef>
-              <a:buFont typeface="Arial"/>
-              <a:buChar char="•"/>
-              <a:defRPr sz="1800" kern="1200">
-                <a:solidFill>
-                  <a:schemeClr val="tx1"/>
-                </a:solidFill>
-                <a:latin typeface="+mn-lt"/>
-                <a:ea typeface="+mn-ea"/>
-                <a:cs typeface="+mn-cs"/>
-              </a:defRPr>
-            </a:lvl9pPr>
-          </a:lstStyle>
-          <a:p>
-            <a:pPr marL="0" indent="0">
-              <a:buFont typeface="Arial"/>
-              <a:buNone/>
-            </a:pPr>
-            <a:endParaRPr lang="en-US" sz="2200" dirty="0"/>
-          </a:p>
-        </p:txBody>
-      </p:sp>
-      <p:pic>
-        <p:nvPicPr>
-          <p:cNvPr id="2" name="Picture 1">
-            <a:extLst>
-              <a:ext uri="{FF2B5EF4-FFF2-40B4-BE49-F238E27FC236}">
-                <a16:creationId xmlns:a16="http://schemas.microsoft.com/office/drawing/2014/main" id="{BBF8972F-8C4D-D66E-3B57-965BBA56F234}"/>
-              </a:ext>
-            </a:extLst>
-          </p:cNvPr>
-          <p:cNvPicPr>
-            <a:picLocks noChangeAspect="1"/>
-          </p:cNvPicPr>
-          <p:nvPr/>
-        </p:nvPicPr>
-        <p:blipFill>
-          <a:blip r:embed="rId3"/>
-          <a:stretch>
-            <a:fillRect/>
-          </a:stretch>
-        </p:blipFill>
-        <p:spPr>
-          <a:xfrm>
-            <a:off x="788324" y="1547447"/>
-            <a:ext cx="10865428" cy="4672484"/>
-          </a:xfrm>
-          <a:prstGeom prst="rect">
-            <a:avLst/>
-          </a:prstGeom>
-        </p:spPr>
-      </p:pic>
-    </p:spTree>
-    <p:custDataLst>
-      <p:tags r:id="rId1"/>
-    </p:custDataLst>
-    <p:extLst>
-      <p:ext uri="{BB962C8B-B14F-4D97-AF65-F5344CB8AC3E}">
-        <p14:creationId xmlns:p14="http://schemas.microsoft.com/office/powerpoint/2010/main" val="1935373820"/>
       </p:ext>
     </p:extLst>
   </p:cSld>
@@ -14767,7 +14504,7 @@
         <p:cNvPr id="1" name="">
           <a:extLst>
             <a:ext uri="{FF2B5EF4-FFF2-40B4-BE49-F238E27FC236}">
-              <a16:creationId xmlns:a16="http://schemas.microsoft.com/office/drawing/2014/main" id="{D16DB558-7141-B0CE-D399-712C1073BFD7}"/>
+              <a16:creationId xmlns:a16="http://schemas.microsoft.com/office/drawing/2014/main" id="{BAD1598F-DBE3-7B78-D1F9-0BA7F7DC75BC}"/>
             </a:ext>
           </a:extLst>
         </p:cNvPr>
@@ -14784,10 +14521,10 @@
       </p:grpSpPr>
       <p:sp>
         <p:nvSpPr>
-          <p:cNvPr id="6" name="Title 1">
+          <p:cNvPr id="9" name="Title 1">
             <a:extLst>
               <a:ext uri="{FF2B5EF4-FFF2-40B4-BE49-F238E27FC236}">
-                <a16:creationId xmlns:a16="http://schemas.microsoft.com/office/drawing/2014/main" id="{12CF5900-71B3-70B0-7CF1-4A1C535AD04B}"/>
+                <a16:creationId xmlns:a16="http://schemas.microsoft.com/office/drawing/2014/main" id="{34A3B939-6057-23B6-25B3-E33A2D205C2A}"/>
               </a:ext>
             </a:extLst>
           </p:cNvPr>
@@ -14800,8 +14537,8 @@
         </p:nvSpPr>
         <p:spPr>
           <a:xfrm>
-            <a:off x="538248" y="383051"/>
-            <a:ext cx="5929053" cy="1325563"/>
+            <a:off x="838200" y="365125"/>
+            <a:ext cx="10515600" cy="1325563"/>
           </a:xfrm>
         </p:spPr>
         <p:txBody>
@@ -14812,17 +14549,17 @@
           <a:p>
             <a:r>
               <a:rPr lang="en-US" dirty="0"/>
-              <a:t>POPULAR LANGUAGES</a:t>
+              <a:t>APPENDIX</a:t>
             </a:r>
           </a:p>
         </p:txBody>
       </p:sp>
       <p:sp>
         <p:nvSpPr>
-          <p:cNvPr id="7" name="Content Placeholder 2">
+          <p:cNvPr id="10" name="Content Placeholder 3">
             <a:extLst>
               <a:ext uri="{FF2B5EF4-FFF2-40B4-BE49-F238E27FC236}">
-                <a16:creationId xmlns:a16="http://schemas.microsoft.com/office/drawing/2014/main" id="{95B1AABA-34AF-B1F5-3C7F-11AEB9E03637}"/>
+                <a16:creationId xmlns:a16="http://schemas.microsoft.com/office/drawing/2014/main" id="{8E40FF55-AE57-CB43-454D-CEFBE080CE8E}"/>
               </a:ext>
             </a:extLst>
           </p:cNvPr>
@@ -14833,8 +14570,8 @@
         </p:nvSpPr>
         <p:spPr>
           <a:xfrm>
-            <a:off x="878305" y="2191385"/>
-            <a:ext cx="10525371" cy="2862753"/>
+            <a:off x="4544291" y="1825625"/>
+            <a:ext cx="6809509" cy="700000"/>
           </a:xfrm>
           <a:prstGeom prst="rect">
             <a:avLst/>
@@ -14842,7 +14579,7 @@
         </p:spPr>
         <p:txBody>
           <a:bodyPr vert="horz" lIns="91440" tIns="45720" rIns="91440" bIns="45720" rtlCol="0">
-            <a:normAutofit/>
+            <a:normAutofit fontScale="62500" lnSpcReduction="20000"/>
           </a:bodyPr>
           <a:lstStyle>
             <a:lvl1pPr marL="228600" indent="-228600" algn="l" defTabSz="914400" rtl="0" eaLnBrk="1" latinLnBrk="0" hangingPunct="1">
@@ -15009,26 +14746,17 @@
             </a:lvl9pPr>
           </a:lstStyle>
           <a:p>
-            <a:pPr marL="0" indent="0">
-              <a:buFont typeface="Arial"/>
-              <a:buNone/>
-            </a:pPr>
             <a:r>
-              <a:rPr lang="en-US" sz="2200" dirty="0"/>
-              <a:t>.</a:t>
+              <a:rPr lang="en-US"/>
+              <a:t>Additional charts from the analysis: cloud platform usage and web framework usage, current vs. future interest.</a:t>
             </a:r>
+            <a:endParaRPr lang="en-US" dirty="0"/>
           </a:p>
         </p:txBody>
       </p:sp>
       <p:pic>
         <p:nvPicPr>
-          <p:cNvPr id="3" name="Picture 2" descr="popular_languages_chart.png">
-            <a:extLst>
-              <a:ext uri="{FF2B5EF4-FFF2-40B4-BE49-F238E27FC236}">
-                <a16:creationId xmlns:a16="http://schemas.microsoft.com/office/drawing/2014/main" id="{420ED79C-5143-1D17-CAF6-6B53AAE0DC32}"/>
-              </a:ext>
-            </a:extLst>
-          </p:cNvPr>
+          <p:cNvPr id="11" name="Picture 10" descr="platform_current.png"/>
           <p:cNvPicPr>
             <a:picLocks noChangeAspect="1"/>
           </p:cNvPicPr>
@@ -15042,8 +14770,32 @@
         </p:blipFill>
         <p:spPr>
           <a:xfrm>
-            <a:off x="703385" y="1547447"/>
-            <a:ext cx="10832123" cy="4702628"/>
+            <a:off x="371789" y="1507253"/>
+            <a:ext cx="4172502" cy="2818941"/>
+          </a:xfrm>
+          <a:prstGeom prst="rect">
+            <a:avLst/>
+          </a:prstGeom>
+        </p:spPr>
+      </p:pic>
+      <p:pic>
+        <p:nvPicPr>
+          <p:cNvPr id="12" name="Picture 11" descr="webframe_current.png"/>
+          <p:cNvPicPr>
+            <a:picLocks noChangeAspect="1"/>
+          </p:cNvPicPr>
+          <p:nvPr/>
+        </p:nvPicPr>
+        <p:blipFill>
+          <a:blip r:embed="rId4"/>
+          <a:stretch>
+            <a:fillRect/>
+          </a:stretch>
+        </p:blipFill>
+        <p:spPr>
+          <a:xfrm>
+            <a:off x="5010702" y="2305278"/>
+            <a:ext cx="6809509" cy="4041831"/>
           </a:xfrm>
           <a:prstGeom prst="rect">
             <a:avLst/>
@@ -15056,7 +14808,7 @@
     </p:custDataLst>
     <p:extLst>
       <p:ext uri="{BB962C8B-B14F-4D97-AF65-F5344CB8AC3E}">
-        <p14:creationId xmlns:p14="http://schemas.microsoft.com/office/powerpoint/2010/main" val="1945902534"/>
+        <p14:creationId xmlns:p14="http://schemas.microsoft.com/office/powerpoint/2010/main" val="1860158657"/>
       </p:ext>
     </p:extLst>
   </p:cSld>
@@ -16372,6 +16124,617 @@
         <p:cNvPr id="1" name="">
           <a:extLst>
             <a:ext uri="{FF2B5EF4-FFF2-40B4-BE49-F238E27FC236}">
+              <a16:creationId xmlns:a16="http://schemas.microsoft.com/office/drawing/2014/main" id="{F1FC4E31-32FC-4A23-CEF9-98F0BB9F13E9}"/>
+            </a:ext>
+          </a:extLst>
+        </p:cNvPr>
+        <p:cNvGrpSpPr/>
+        <p:nvPr/>
+      </p:nvGrpSpPr>
+      <p:grpSpPr>
+        <a:xfrm>
+          <a:off x="0" y="0"/>
+          <a:ext cx="0" cy="0"/>
+          <a:chOff x="0" y="0"/>
+          <a:chExt cx="0" cy="0"/>
+        </a:xfrm>
+      </p:grpSpPr>
+      <p:sp>
+        <p:nvSpPr>
+          <p:cNvPr id="9" name="Title 1">
+            <a:extLst>
+              <a:ext uri="{FF2B5EF4-FFF2-40B4-BE49-F238E27FC236}">
+                <a16:creationId xmlns:a16="http://schemas.microsoft.com/office/drawing/2014/main" id="{8334EF5D-2E2A-7FE5-06C6-01ACAB1F420F}"/>
+              </a:ext>
+            </a:extLst>
+          </p:cNvPr>
+          <p:cNvSpPr>
+            <a:spLocks noGrp="1"/>
+          </p:cNvSpPr>
+          <p:nvPr>
+            <p:ph type="title"/>
+          </p:nvPr>
+        </p:nvSpPr>
+        <p:spPr>
+          <a:xfrm>
+            <a:off x="538248" y="383051"/>
+            <a:ext cx="5929053" cy="1325563"/>
+          </a:xfrm>
+        </p:spPr>
+        <p:txBody>
+          <a:bodyPr anchor="ctr">
+            <a:normAutofit/>
+          </a:bodyPr>
+          <a:lstStyle/>
+          <a:p>
+            <a:r>
+              <a:rPr lang="en-US" dirty="0"/>
+              <a:t> JOB POSTINGS</a:t>
+            </a:r>
+          </a:p>
+        </p:txBody>
+      </p:sp>
+      <p:sp>
+        <p:nvSpPr>
+          <p:cNvPr id="10" name="Content Placeholder 2">
+            <a:extLst>
+              <a:ext uri="{FF2B5EF4-FFF2-40B4-BE49-F238E27FC236}">
+                <a16:creationId xmlns:a16="http://schemas.microsoft.com/office/drawing/2014/main" id="{83F79416-0AFB-FC80-07E8-3CF2B4E7E798}"/>
+              </a:ext>
+            </a:extLst>
+          </p:cNvPr>
+          <p:cNvSpPr txBox="1">
+            <a:spLocks/>
+          </p:cNvSpPr>
+          <p:nvPr/>
+        </p:nvSpPr>
+        <p:spPr>
+          <a:xfrm>
+            <a:off x="914400" y="2191385"/>
+            <a:ext cx="10489276" cy="2862753"/>
+          </a:xfrm>
+          <a:prstGeom prst="rect">
+            <a:avLst/>
+          </a:prstGeom>
+        </p:spPr>
+        <p:txBody>
+          <a:bodyPr vert="horz" lIns="91440" tIns="45720" rIns="91440" bIns="45720" rtlCol="0">
+            <a:normAutofit/>
+          </a:bodyPr>
+          <a:lstStyle>
+            <a:lvl1pPr marL="228600" indent="-228600" algn="l" defTabSz="914400" rtl="0" eaLnBrk="1" latinLnBrk="0" hangingPunct="1">
+              <a:lnSpc>
+                <a:spcPct val="90000"/>
+              </a:lnSpc>
+              <a:spcBef>
+                <a:spcPts val="1000"/>
+              </a:spcBef>
+              <a:buFont typeface="Arial"/>
+              <a:buChar char="•"/>
+              <a:defRPr sz="2800" kern="1200">
+                <a:solidFill>
+                  <a:srgbClr val="262626"/>
+                </a:solidFill>
+                <a:latin typeface="IBM Plex Sans" panose="020B0503050203000203" pitchFamily="34" charset="0"/>
+                <a:ea typeface="+mn-ea"/>
+                <a:cs typeface="+mn-cs"/>
+              </a:defRPr>
+            </a:lvl1pPr>
+            <a:lvl2pPr marL="685800" indent="-228600" algn="l" defTabSz="914400" rtl="0" eaLnBrk="1" latinLnBrk="0" hangingPunct="1">
+              <a:lnSpc>
+                <a:spcPct val="90000"/>
+              </a:lnSpc>
+              <a:spcBef>
+                <a:spcPts val="500"/>
+              </a:spcBef>
+              <a:buFont typeface="Arial"/>
+              <a:buChar char="•"/>
+              <a:defRPr sz="2400" kern="1200">
+                <a:solidFill>
+                  <a:srgbClr val="262626"/>
+                </a:solidFill>
+                <a:latin typeface="IBM Plex Sans" panose="020B0503050203000203" pitchFamily="34" charset="0"/>
+                <a:ea typeface="+mn-ea"/>
+                <a:cs typeface="+mn-cs"/>
+              </a:defRPr>
+            </a:lvl2pPr>
+            <a:lvl3pPr marL="1143000" indent="-228600" algn="l" defTabSz="914400" rtl="0" eaLnBrk="1" latinLnBrk="0" hangingPunct="1">
+              <a:lnSpc>
+                <a:spcPct val="90000"/>
+              </a:lnSpc>
+              <a:spcBef>
+                <a:spcPts val="500"/>
+              </a:spcBef>
+              <a:buFont typeface="Arial"/>
+              <a:buChar char="•"/>
+              <a:defRPr sz="2000" kern="1200">
+                <a:solidFill>
+                  <a:srgbClr val="262626"/>
+                </a:solidFill>
+                <a:latin typeface="IBM Plex Sans" panose="020B0503050203000203" pitchFamily="34" charset="0"/>
+                <a:ea typeface="+mn-ea"/>
+                <a:cs typeface="+mn-cs"/>
+              </a:defRPr>
+            </a:lvl3pPr>
+            <a:lvl4pPr marL="1600200" indent="-228600" algn="l" defTabSz="914400" rtl="0" eaLnBrk="1" latinLnBrk="0" hangingPunct="1">
+              <a:lnSpc>
+                <a:spcPct val="90000"/>
+              </a:lnSpc>
+              <a:spcBef>
+                <a:spcPts val="500"/>
+              </a:spcBef>
+              <a:buFont typeface="Arial"/>
+              <a:buChar char="•"/>
+              <a:defRPr sz="1800" kern="1200">
+                <a:solidFill>
+                  <a:srgbClr val="525252"/>
+                </a:solidFill>
+                <a:latin typeface="IBM Plex Sans" panose="020B0503050203000203" pitchFamily="34" charset="0"/>
+                <a:ea typeface="+mn-ea"/>
+                <a:cs typeface="+mn-cs"/>
+              </a:defRPr>
+            </a:lvl4pPr>
+            <a:lvl5pPr marL="2057400" indent="-228600" algn="l" defTabSz="914400" rtl="0" eaLnBrk="1" latinLnBrk="0" hangingPunct="1">
+              <a:lnSpc>
+                <a:spcPct val="90000"/>
+              </a:lnSpc>
+              <a:spcBef>
+                <a:spcPts val="500"/>
+              </a:spcBef>
+              <a:buFont typeface="Arial"/>
+              <a:buChar char="•"/>
+              <a:defRPr sz="1800" kern="1200">
+                <a:solidFill>
+                  <a:srgbClr val="525252"/>
+                </a:solidFill>
+                <a:latin typeface="IBM Plex Sans" panose="020B0503050203000203" pitchFamily="34" charset="0"/>
+                <a:ea typeface="+mn-ea"/>
+                <a:cs typeface="+mn-cs"/>
+              </a:defRPr>
+            </a:lvl5pPr>
+            <a:lvl6pPr marL="2514600" indent="-228600" algn="l" defTabSz="914400" rtl="0" eaLnBrk="1" latinLnBrk="0" hangingPunct="1">
+              <a:lnSpc>
+                <a:spcPct val="90000"/>
+              </a:lnSpc>
+              <a:spcBef>
+                <a:spcPts val="500"/>
+              </a:spcBef>
+              <a:buFont typeface="Arial"/>
+              <a:buChar char="•"/>
+              <a:defRPr sz="1800" kern="1200">
+                <a:solidFill>
+                  <a:schemeClr val="tx1"/>
+                </a:solidFill>
+                <a:latin typeface="+mn-lt"/>
+                <a:ea typeface="+mn-ea"/>
+                <a:cs typeface="+mn-cs"/>
+              </a:defRPr>
+            </a:lvl6pPr>
+            <a:lvl7pPr marL="2971800" indent="-228600" algn="l" defTabSz="914400" rtl="0" eaLnBrk="1" latinLnBrk="0" hangingPunct="1">
+              <a:lnSpc>
+                <a:spcPct val="90000"/>
+              </a:lnSpc>
+              <a:spcBef>
+                <a:spcPts val="500"/>
+              </a:spcBef>
+              <a:buFont typeface="Arial"/>
+              <a:buChar char="•"/>
+              <a:defRPr sz="1800" kern="1200">
+                <a:solidFill>
+                  <a:schemeClr val="tx1"/>
+                </a:solidFill>
+                <a:latin typeface="+mn-lt"/>
+                <a:ea typeface="+mn-ea"/>
+                <a:cs typeface="+mn-cs"/>
+              </a:defRPr>
+            </a:lvl7pPr>
+            <a:lvl8pPr marL="3429000" indent="-228600" algn="l" defTabSz="914400" rtl="0" eaLnBrk="1" latinLnBrk="0" hangingPunct="1">
+              <a:lnSpc>
+                <a:spcPct val="90000"/>
+              </a:lnSpc>
+              <a:spcBef>
+                <a:spcPts val="500"/>
+              </a:spcBef>
+              <a:buFont typeface="Arial"/>
+              <a:buChar char="•"/>
+              <a:defRPr sz="1800" kern="1200">
+                <a:solidFill>
+                  <a:schemeClr val="tx1"/>
+                </a:solidFill>
+                <a:latin typeface="+mn-lt"/>
+                <a:ea typeface="+mn-ea"/>
+                <a:cs typeface="+mn-cs"/>
+              </a:defRPr>
+            </a:lvl8pPr>
+            <a:lvl9pPr marL="3886200" indent="-228600" algn="l" defTabSz="914400" rtl="0" eaLnBrk="1" latinLnBrk="0" hangingPunct="1">
+              <a:lnSpc>
+                <a:spcPct val="90000"/>
+              </a:lnSpc>
+              <a:spcBef>
+                <a:spcPts val="500"/>
+              </a:spcBef>
+              <a:buFont typeface="Arial"/>
+              <a:buChar char="•"/>
+              <a:defRPr sz="1800" kern="1200">
+                <a:solidFill>
+                  <a:schemeClr val="tx1"/>
+                </a:solidFill>
+                <a:latin typeface="+mn-lt"/>
+                <a:ea typeface="+mn-ea"/>
+                <a:cs typeface="+mn-cs"/>
+              </a:defRPr>
+            </a:lvl9pPr>
+          </a:lstStyle>
+          <a:p>
+            <a:pPr marL="0" indent="0">
+              <a:buFont typeface="Arial"/>
+              <a:buNone/>
+            </a:pPr>
+            <a:endParaRPr lang="en-US" sz="2200" dirty="0"/>
+          </a:p>
+        </p:txBody>
+      </p:sp>
+      <p:pic>
+        <p:nvPicPr>
+          <p:cNvPr id="2" name="Picture 1">
+            <a:extLst>
+              <a:ext uri="{FF2B5EF4-FFF2-40B4-BE49-F238E27FC236}">
+                <a16:creationId xmlns:a16="http://schemas.microsoft.com/office/drawing/2014/main" id="{BBF8972F-8C4D-D66E-3B57-965BBA56F234}"/>
+              </a:ext>
+            </a:extLst>
+          </p:cNvPr>
+          <p:cNvPicPr>
+            <a:picLocks noChangeAspect="1"/>
+          </p:cNvPicPr>
+          <p:nvPr/>
+        </p:nvPicPr>
+        <p:blipFill>
+          <a:blip r:embed="rId3"/>
+          <a:stretch>
+            <a:fillRect/>
+          </a:stretch>
+        </p:blipFill>
+        <p:spPr>
+          <a:xfrm>
+            <a:off x="788324" y="1547447"/>
+            <a:ext cx="10865428" cy="4672484"/>
+          </a:xfrm>
+          <a:prstGeom prst="rect">
+            <a:avLst/>
+          </a:prstGeom>
+        </p:spPr>
+      </p:pic>
+    </p:spTree>
+    <p:custDataLst>
+      <p:tags r:id="rId1"/>
+    </p:custDataLst>
+    <p:extLst>
+      <p:ext uri="{BB962C8B-B14F-4D97-AF65-F5344CB8AC3E}">
+        <p14:creationId xmlns:p14="http://schemas.microsoft.com/office/powerpoint/2010/main" val="1935373820"/>
+      </p:ext>
+    </p:extLst>
+  </p:cSld>
+  <p:clrMapOvr>
+    <a:masterClrMapping/>
+  </p:clrMapOvr>
+</p:sld>
+</file>
+
+<file path=ppt/slides/slide8.xml><?xml version="1.0" encoding="utf-8"?>
+<p:sld xmlns:a="http://schemas.openxmlformats.org/drawingml/2006/main" xmlns:r="http://schemas.openxmlformats.org/officeDocument/2006/relationships" xmlns:p="http://schemas.openxmlformats.org/presentationml/2006/main">
+  <p:cSld>
+    <p:spTree>
+      <p:nvGrpSpPr>
+        <p:cNvPr id="1" name="">
+          <a:extLst>
+            <a:ext uri="{FF2B5EF4-FFF2-40B4-BE49-F238E27FC236}">
+              <a16:creationId xmlns:a16="http://schemas.microsoft.com/office/drawing/2014/main" id="{D16DB558-7141-B0CE-D399-712C1073BFD7}"/>
+            </a:ext>
+          </a:extLst>
+        </p:cNvPr>
+        <p:cNvGrpSpPr/>
+        <p:nvPr/>
+      </p:nvGrpSpPr>
+      <p:grpSpPr>
+        <a:xfrm>
+          <a:off x="0" y="0"/>
+          <a:ext cx="0" cy="0"/>
+          <a:chOff x="0" y="0"/>
+          <a:chExt cx="0" cy="0"/>
+        </a:xfrm>
+      </p:grpSpPr>
+      <p:sp>
+        <p:nvSpPr>
+          <p:cNvPr id="6" name="Title 1">
+            <a:extLst>
+              <a:ext uri="{FF2B5EF4-FFF2-40B4-BE49-F238E27FC236}">
+                <a16:creationId xmlns:a16="http://schemas.microsoft.com/office/drawing/2014/main" id="{12CF5900-71B3-70B0-7CF1-4A1C535AD04B}"/>
+              </a:ext>
+            </a:extLst>
+          </p:cNvPr>
+          <p:cNvSpPr>
+            <a:spLocks noGrp="1"/>
+          </p:cNvSpPr>
+          <p:nvPr>
+            <p:ph type="title"/>
+          </p:nvPr>
+        </p:nvSpPr>
+        <p:spPr>
+          <a:xfrm>
+            <a:off x="538248" y="383051"/>
+            <a:ext cx="5929053" cy="1325563"/>
+          </a:xfrm>
+        </p:spPr>
+        <p:txBody>
+          <a:bodyPr anchor="ctr">
+            <a:normAutofit/>
+          </a:bodyPr>
+          <a:lstStyle/>
+          <a:p>
+            <a:r>
+              <a:rPr lang="en-US" dirty="0"/>
+              <a:t>POPULAR LANGUAGES</a:t>
+            </a:r>
+          </a:p>
+        </p:txBody>
+      </p:sp>
+      <p:sp>
+        <p:nvSpPr>
+          <p:cNvPr id="7" name="Content Placeholder 2">
+            <a:extLst>
+              <a:ext uri="{FF2B5EF4-FFF2-40B4-BE49-F238E27FC236}">
+                <a16:creationId xmlns:a16="http://schemas.microsoft.com/office/drawing/2014/main" id="{95B1AABA-34AF-B1F5-3C7F-11AEB9E03637}"/>
+              </a:ext>
+            </a:extLst>
+          </p:cNvPr>
+          <p:cNvSpPr txBox="1">
+            <a:spLocks/>
+          </p:cNvSpPr>
+          <p:nvPr/>
+        </p:nvSpPr>
+        <p:spPr>
+          <a:xfrm>
+            <a:off x="878305" y="2191385"/>
+            <a:ext cx="10525371" cy="2862753"/>
+          </a:xfrm>
+          <a:prstGeom prst="rect">
+            <a:avLst/>
+          </a:prstGeom>
+        </p:spPr>
+        <p:txBody>
+          <a:bodyPr vert="horz" lIns="91440" tIns="45720" rIns="91440" bIns="45720" rtlCol="0">
+            <a:normAutofit/>
+          </a:bodyPr>
+          <a:lstStyle>
+            <a:lvl1pPr marL="228600" indent="-228600" algn="l" defTabSz="914400" rtl="0" eaLnBrk="1" latinLnBrk="0" hangingPunct="1">
+              <a:lnSpc>
+                <a:spcPct val="90000"/>
+              </a:lnSpc>
+              <a:spcBef>
+                <a:spcPts val="1000"/>
+              </a:spcBef>
+              <a:buFont typeface="Arial"/>
+              <a:buChar char="•"/>
+              <a:defRPr sz="2800" kern="1200">
+                <a:solidFill>
+                  <a:srgbClr val="262626"/>
+                </a:solidFill>
+                <a:latin typeface="IBM Plex Sans" panose="020B0503050203000203" pitchFamily="34" charset="0"/>
+                <a:ea typeface="+mn-ea"/>
+                <a:cs typeface="+mn-cs"/>
+              </a:defRPr>
+            </a:lvl1pPr>
+            <a:lvl2pPr marL="685800" indent="-228600" algn="l" defTabSz="914400" rtl="0" eaLnBrk="1" latinLnBrk="0" hangingPunct="1">
+              <a:lnSpc>
+                <a:spcPct val="90000"/>
+              </a:lnSpc>
+              <a:spcBef>
+                <a:spcPts val="500"/>
+              </a:spcBef>
+              <a:buFont typeface="Arial"/>
+              <a:buChar char="•"/>
+              <a:defRPr sz="2400" kern="1200">
+                <a:solidFill>
+                  <a:srgbClr val="262626"/>
+                </a:solidFill>
+                <a:latin typeface="IBM Plex Sans" panose="020B0503050203000203" pitchFamily="34" charset="0"/>
+                <a:ea typeface="+mn-ea"/>
+                <a:cs typeface="+mn-cs"/>
+              </a:defRPr>
+            </a:lvl2pPr>
+            <a:lvl3pPr marL="1143000" indent="-228600" algn="l" defTabSz="914400" rtl="0" eaLnBrk="1" latinLnBrk="0" hangingPunct="1">
+              <a:lnSpc>
+                <a:spcPct val="90000"/>
+              </a:lnSpc>
+              <a:spcBef>
+                <a:spcPts val="500"/>
+              </a:spcBef>
+              <a:buFont typeface="Arial"/>
+              <a:buChar char="•"/>
+              <a:defRPr sz="2000" kern="1200">
+                <a:solidFill>
+                  <a:srgbClr val="262626"/>
+                </a:solidFill>
+                <a:latin typeface="IBM Plex Sans" panose="020B0503050203000203" pitchFamily="34" charset="0"/>
+                <a:ea typeface="+mn-ea"/>
+                <a:cs typeface="+mn-cs"/>
+              </a:defRPr>
+            </a:lvl3pPr>
+            <a:lvl4pPr marL="1600200" indent="-228600" algn="l" defTabSz="914400" rtl="0" eaLnBrk="1" latinLnBrk="0" hangingPunct="1">
+              <a:lnSpc>
+                <a:spcPct val="90000"/>
+              </a:lnSpc>
+              <a:spcBef>
+                <a:spcPts val="500"/>
+              </a:spcBef>
+              <a:buFont typeface="Arial"/>
+              <a:buChar char="•"/>
+              <a:defRPr sz="1800" kern="1200">
+                <a:solidFill>
+                  <a:srgbClr val="525252"/>
+                </a:solidFill>
+                <a:latin typeface="IBM Plex Sans" panose="020B0503050203000203" pitchFamily="34" charset="0"/>
+                <a:ea typeface="+mn-ea"/>
+                <a:cs typeface="+mn-cs"/>
+              </a:defRPr>
+            </a:lvl4pPr>
+            <a:lvl5pPr marL="2057400" indent="-228600" algn="l" defTabSz="914400" rtl="0" eaLnBrk="1" latinLnBrk="0" hangingPunct="1">
+              <a:lnSpc>
+                <a:spcPct val="90000"/>
+              </a:lnSpc>
+              <a:spcBef>
+                <a:spcPts val="500"/>
+              </a:spcBef>
+              <a:buFont typeface="Arial"/>
+              <a:buChar char="•"/>
+              <a:defRPr sz="1800" kern="1200">
+                <a:solidFill>
+                  <a:srgbClr val="525252"/>
+                </a:solidFill>
+                <a:latin typeface="IBM Plex Sans" panose="020B0503050203000203" pitchFamily="34" charset="0"/>
+                <a:ea typeface="+mn-ea"/>
+                <a:cs typeface="+mn-cs"/>
+              </a:defRPr>
+            </a:lvl5pPr>
+            <a:lvl6pPr marL="2514600" indent="-228600" algn="l" defTabSz="914400" rtl="0" eaLnBrk="1" latinLnBrk="0" hangingPunct="1">
+              <a:lnSpc>
+                <a:spcPct val="90000"/>
+              </a:lnSpc>
+              <a:spcBef>
+                <a:spcPts val="500"/>
+              </a:spcBef>
+              <a:buFont typeface="Arial"/>
+              <a:buChar char="•"/>
+              <a:defRPr sz="1800" kern="1200">
+                <a:solidFill>
+                  <a:schemeClr val="tx1"/>
+                </a:solidFill>
+                <a:latin typeface="+mn-lt"/>
+                <a:ea typeface="+mn-ea"/>
+                <a:cs typeface="+mn-cs"/>
+              </a:defRPr>
+            </a:lvl6pPr>
+            <a:lvl7pPr marL="2971800" indent="-228600" algn="l" defTabSz="914400" rtl="0" eaLnBrk="1" latinLnBrk="0" hangingPunct="1">
+              <a:lnSpc>
+                <a:spcPct val="90000"/>
+              </a:lnSpc>
+              <a:spcBef>
+                <a:spcPts val="500"/>
+              </a:spcBef>
+              <a:buFont typeface="Arial"/>
+              <a:buChar char="•"/>
+              <a:defRPr sz="1800" kern="1200">
+                <a:solidFill>
+                  <a:schemeClr val="tx1"/>
+                </a:solidFill>
+                <a:latin typeface="+mn-lt"/>
+                <a:ea typeface="+mn-ea"/>
+                <a:cs typeface="+mn-cs"/>
+              </a:defRPr>
+            </a:lvl7pPr>
+            <a:lvl8pPr marL="3429000" indent="-228600" algn="l" defTabSz="914400" rtl="0" eaLnBrk="1" latinLnBrk="0" hangingPunct="1">
+              <a:lnSpc>
+                <a:spcPct val="90000"/>
+              </a:lnSpc>
+              <a:spcBef>
+                <a:spcPts val="500"/>
+              </a:spcBef>
+              <a:buFont typeface="Arial"/>
+              <a:buChar char="•"/>
+              <a:defRPr sz="1800" kern="1200">
+                <a:solidFill>
+                  <a:schemeClr val="tx1"/>
+                </a:solidFill>
+                <a:latin typeface="+mn-lt"/>
+                <a:ea typeface="+mn-ea"/>
+                <a:cs typeface="+mn-cs"/>
+              </a:defRPr>
+            </a:lvl8pPr>
+            <a:lvl9pPr marL="3886200" indent="-228600" algn="l" defTabSz="914400" rtl="0" eaLnBrk="1" latinLnBrk="0" hangingPunct="1">
+              <a:lnSpc>
+                <a:spcPct val="90000"/>
+              </a:lnSpc>
+              <a:spcBef>
+                <a:spcPts val="500"/>
+              </a:spcBef>
+              <a:buFont typeface="Arial"/>
+              <a:buChar char="•"/>
+              <a:defRPr sz="1800" kern="1200">
+                <a:solidFill>
+                  <a:schemeClr val="tx1"/>
+                </a:solidFill>
+                <a:latin typeface="+mn-lt"/>
+                <a:ea typeface="+mn-ea"/>
+                <a:cs typeface="+mn-cs"/>
+              </a:defRPr>
+            </a:lvl9pPr>
+          </a:lstStyle>
+          <a:p>
+            <a:pPr marL="0" indent="0">
+              <a:buFont typeface="Arial"/>
+              <a:buNone/>
+            </a:pPr>
+            <a:r>
+              <a:rPr lang="en-US" sz="2200" dirty="0"/>
+              <a:t>.</a:t>
+            </a:r>
+          </a:p>
+        </p:txBody>
+      </p:sp>
+      <p:pic>
+        <p:nvPicPr>
+          <p:cNvPr id="3" name="Picture 2" descr="popular_languages_chart.png">
+            <a:extLst>
+              <a:ext uri="{FF2B5EF4-FFF2-40B4-BE49-F238E27FC236}">
+                <a16:creationId xmlns:a16="http://schemas.microsoft.com/office/drawing/2014/main" id="{420ED79C-5143-1D17-CAF6-6B53AAE0DC32}"/>
+              </a:ext>
+            </a:extLst>
+          </p:cNvPr>
+          <p:cNvPicPr>
+            <a:picLocks noChangeAspect="1"/>
+          </p:cNvPicPr>
+          <p:nvPr/>
+        </p:nvPicPr>
+        <p:blipFill>
+          <a:blip r:embed="rId3"/>
+          <a:stretch>
+            <a:fillRect/>
+          </a:stretch>
+        </p:blipFill>
+        <p:spPr>
+          <a:xfrm>
+            <a:off x="703385" y="1547447"/>
+            <a:ext cx="10832123" cy="4702628"/>
+          </a:xfrm>
+          <a:prstGeom prst="rect">
+            <a:avLst/>
+          </a:prstGeom>
+        </p:spPr>
+      </p:pic>
+    </p:spTree>
+    <p:custDataLst>
+      <p:tags r:id="rId1"/>
+    </p:custDataLst>
+    <p:extLst>
+      <p:ext uri="{BB962C8B-B14F-4D97-AF65-F5344CB8AC3E}">
+        <p14:creationId xmlns:p14="http://schemas.microsoft.com/office/powerpoint/2010/main" val="1945902534"/>
+      </p:ext>
+    </p:extLst>
+  </p:cSld>
+  <p:clrMapOvr>
+    <a:masterClrMapping/>
+  </p:clrMapOvr>
+</p:sld>
+</file>
+
+<file path=ppt/slides/slide9.xml><?xml version="1.0" encoding="utf-8"?>
+<p:sld xmlns:a="http://schemas.openxmlformats.org/drawingml/2006/main" xmlns:r="http://schemas.openxmlformats.org/officeDocument/2006/relationships" xmlns:p="http://schemas.openxmlformats.org/presentationml/2006/main">
+  <p:cSld>
+    <p:spTree>
+      <p:nvGrpSpPr>
+        <p:cNvPr id="1" name="">
+          <a:extLst>
+            <a:ext uri="{FF2B5EF4-FFF2-40B4-BE49-F238E27FC236}">
               <a16:creationId xmlns:a16="http://schemas.microsoft.com/office/drawing/2014/main" id="{DCE27A2E-C667-F6D3-A1E3-47F70603EABA}"/>
             </a:ext>
           </a:extLst>
@@ -16547,359 +16910,6 @@
     <p:extLst>
       <p:ext uri="{BB962C8B-B14F-4D97-AF65-F5344CB8AC3E}">
         <p14:creationId xmlns:p14="http://schemas.microsoft.com/office/powerpoint/2010/main" val="3684467408"/>
-      </p:ext>
-    </p:extLst>
-  </p:cSld>
-  <p:clrMapOvr>
-    <a:masterClrMapping/>
-  </p:clrMapOvr>
-</p:sld>
-</file>
-
-<file path=ppt/slides/slide8.xml><?xml version="1.0" encoding="utf-8"?>
-<p:sld xmlns:a="http://schemas.openxmlformats.org/drawingml/2006/main" xmlns:r="http://schemas.openxmlformats.org/officeDocument/2006/relationships" xmlns:p="http://schemas.openxmlformats.org/presentationml/2006/main">
-  <p:cSld>
-    <p:spTree>
-      <p:nvGrpSpPr>
-        <p:cNvPr id="1" name="">
-          <a:extLst>
-            <a:ext uri="{FF2B5EF4-FFF2-40B4-BE49-F238E27FC236}">
-              <a16:creationId xmlns:a16="http://schemas.microsoft.com/office/drawing/2014/main" id="{D707BF14-48B4-018D-63EE-DF24A5A8CF9A}"/>
-            </a:ext>
-          </a:extLst>
-        </p:cNvPr>
-        <p:cNvGrpSpPr/>
-        <p:nvPr/>
-      </p:nvGrpSpPr>
-      <p:grpSpPr>
-        <a:xfrm>
-          <a:off x="0" y="0"/>
-          <a:ext cx="0" cy="0"/>
-          <a:chOff x="0" y="0"/>
-          <a:chExt cx="0" cy="0"/>
-        </a:xfrm>
-      </p:grpSpPr>
-      <p:sp>
-        <p:nvSpPr>
-          <p:cNvPr id="2" name="Title 1">
-            <a:extLst>
-              <a:ext uri="{FF2B5EF4-FFF2-40B4-BE49-F238E27FC236}">
-                <a16:creationId xmlns:a16="http://schemas.microsoft.com/office/drawing/2014/main" id="{94444DA4-C4B2-2A92-8A96-C527D8D026A7}"/>
-              </a:ext>
-            </a:extLst>
-          </p:cNvPr>
-          <p:cNvSpPr>
-            <a:spLocks noGrp="1"/>
-          </p:cNvSpPr>
-          <p:nvPr>
-            <p:ph type="title"/>
-          </p:nvPr>
-        </p:nvSpPr>
-        <p:spPr>
-          <a:xfrm>
-            <a:off x="838200" y="365126"/>
-            <a:ext cx="10515600" cy="1081838"/>
-          </a:xfrm>
-        </p:spPr>
-        <p:txBody>
-          <a:bodyPr anchor="ctr">
-            <a:normAutofit fontScale="90000"/>
-          </a:bodyPr>
-          <a:lstStyle/>
-          <a:p>
-            <a:r>
-              <a:rPr lang="en-US" dirty="0"/>
-              <a:t>PROGRAMMING LANGUAGE TRENDS - FINDINGS &amp; IMPLICATIONS</a:t>
-            </a:r>
-          </a:p>
-        </p:txBody>
-      </p:sp>
-      <p:sp>
-        <p:nvSpPr>
-          <p:cNvPr id="4" name="Content Placeholder 3">
-            <a:extLst>
-              <a:ext uri="{FF2B5EF4-FFF2-40B4-BE49-F238E27FC236}">
-                <a16:creationId xmlns:a16="http://schemas.microsoft.com/office/drawing/2014/main" id="{D2166E7F-5223-7C98-EBC0-E8FA35940F98}"/>
-              </a:ext>
-            </a:extLst>
-          </p:cNvPr>
-          <p:cNvSpPr>
-            <a:spLocks noGrp="1"/>
-          </p:cNvSpPr>
-          <p:nvPr>
-            <p:ph sz="half" idx="1"/>
-          </p:nvPr>
-        </p:nvSpPr>
-        <p:spPr>
-          <a:xfrm>
-            <a:off x="838200" y="1600200"/>
-            <a:ext cx="5181600" cy="4572000"/>
-          </a:xfrm>
-        </p:spPr>
-        <p:txBody>
-          <a:bodyPr>
-            <a:normAutofit/>
-          </a:bodyPr>
-          <a:lstStyle/>
-          <a:p>
-            <a:pPr marL="0" indent="0">
-              <a:buNone/>
-            </a:pPr>
-            <a:r>
-              <a:rPr lang="en-US" dirty="0"/>
-              <a:t>Implications:-</a:t>
-            </a:r>
-          </a:p>
-          <a:p>
-            <a:r>
-              <a:rPr lang="en-US" dirty="0"/>
-              <a:t>Continue prioritizing JavaScript/TypeScript tooling and training</a:t>
-            </a:r>
-          </a:p>
-          <a:p>
-            <a:r>
-              <a:rPr lang="en-US" dirty="0"/>
-              <a:t>Invest in Go and Rust skill-building to stay ahead of demand</a:t>
-            </a:r>
-          </a:p>
-          <a:p>
-            <a:r>
-              <a:rPr lang="en-US" dirty="0"/>
-              <a:t>Monitor Java's declining future interest when planning legacy system staffing</a:t>
-            </a:r>
-          </a:p>
-        </p:txBody>
-      </p:sp>
-      <p:graphicFrame>
-        <p:nvGraphicFramePr>
-          <p:cNvPr id="6" name="Content Placeholder 2">
-            <a:extLst>
-              <a:ext uri="{FF2B5EF4-FFF2-40B4-BE49-F238E27FC236}">
-                <a16:creationId xmlns:a16="http://schemas.microsoft.com/office/drawing/2014/main" id="{96C81F0B-BAA7-2EA4-F238-228210EAE3FB}"/>
-              </a:ext>
-            </a:extLst>
-          </p:cNvPr>
-          <p:cNvGraphicFramePr>
-            <a:graphicFrameLocks noGrp="1"/>
-          </p:cNvGraphicFramePr>
-          <p:nvPr>
-            <p:ph sz="half" idx="2"/>
-            <p:extLst>
-              <p:ext uri="{D42A27DB-BD31-4B8C-83A1-F6EECF244321}">
-                <p14:modId xmlns:p14="http://schemas.microsoft.com/office/powerpoint/2010/main" val="2142551381"/>
-              </p:ext>
-            </p:extLst>
-          </p:nvPr>
-        </p:nvGraphicFramePr>
-        <p:xfrm>
-          <a:off x="6172200" y="1600200"/>
-          <a:ext cx="5181600" cy="4572000"/>
-        </p:xfrm>
-        <a:graphic>
-          <a:graphicData uri="http://schemas.openxmlformats.org/drawingml/2006/diagram">
-            <dgm:relIds xmlns:dgm="http://schemas.openxmlformats.org/drawingml/2006/diagram" xmlns:r="http://schemas.openxmlformats.org/officeDocument/2006/relationships" r:dm="rId3" r:lo="rId4" r:qs="rId5" r:cs="rId6"/>
-          </a:graphicData>
-        </a:graphic>
-      </p:graphicFrame>
-    </p:spTree>
-    <p:custDataLst>
-      <p:tags r:id="rId1"/>
-    </p:custDataLst>
-    <p:extLst>
-      <p:ext uri="{BB962C8B-B14F-4D97-AF65-F5344CB8AC3E}">
-        <p14:creationId xmlns:p14="http://schemas.microsoft.com/office/powerpoint/2010/main" val="3701288749"/>
-      </p:ext>
-    </p:extLst>
-  </p:cSld>
-  <p:clrMapOvr>
-    <a:masterClrMapping/>
-  </p:clrMapOvr>
-</p:sld>
-</file>
-
-<file path=ppt/slides/slide9.xml><?xml version="1.0" encoding="utf-8"?>
-<p:sld xmlns:a="http://schemas.openxmlformats.org/drawingml/2006/main" xmlns:r="http://schemas.openxmlformats.org/officeDocument/2006/relationships" xmlns:p="http://schemas.openxmlformats.org/presentationml/2006/main">
-  <p:cSld>
-    <p:spTree>
-      <p:nvGrpSpPr>
-        <p:cNvPr id="1" name="">
-          <a:extLst>
-            <a:ext uri="{FF2B5EF4-FFF2-40B4-BE49-F238E27FC236}">
-              <a16:creationId xmlns:a16="http://schemas.microsoft.com/office/drawing/2014/main" id="{13AA0F35-C02C-0C12-3664-049CAC5AFA69}"/>
-            </a:ext>
-          </a:extLst>
-        </p:cNvPr>
-        <p:cNvGrpSpPr/>
-        <p:nvPr/>
-      </p:nvGrpSpPr>
-      <p:grpSpPr>
-        <a:xfrm>
-          <a:off x="0" y="0"/>
-          <a:ext cx="0" cy="0"/>
-          <a:chOff x="0" y="0"/>
-          <a:chExt cx="0" cy="0"/>
-        </a:xfrm>
-      </p:grpSpPr>
-      <p:sp>
-        <p:nvSpPr>
-          <p:cNvPr id="2" name="Title 1">
-            <a:extLst>
-              <a:ext uri="{FF2B5EF4-FFF2-40B4-BE49-F238E27FC236}">
-                <a16:creationId xmlns:a16="http://schemas.microsoft.com/office/drawing/2014/main" id="{580B430B-2D6C-26E3-5D00-4D061A250E06}"/>
-              </a:ext>
-            </a:extLst>
-          </p:cNvPr>
-          <p:cNvSpPr>
-            <a:spLocks noGrp="1"/>
-          </p:cNvSpPr>
-          <p:nvPr>
-            <p:ph type="title"/>
-          </p:nvPr>
-        </p:nvSpPr>
-        <p:spPr>
-          <a:xfrm>
-            <a:off x="862584" y="428768"/>
-            <a:ext cx="10515600" cy="1325563"/>
-          </a:xfrm>
-        </p:spPr>
-        <p:txBody>
-          <a:bodyPr/>
-          <a:lstStyle/>
-          <a:p>
-            <a:r>
-              <a:rPr lang="en-US" dirty="0"/>
-              <a:t>DATABASE TRENDS</a:t>
-            </a:r>
-          </a:p>
-        </p:txBody>
-      </p:sp>
-      <p:sp>
-        <p:nvSpPr>
-          <p:cNvPr id="3" name="Content Placeholder 2">
-            <a:extLst>
-              <a:ext uri="{FF2B5EF4-FFF2-40B4-BE49-F238E27FC236}">
-                <a16:creationId xmlns:a16="http://schemas.microsoft.com/office/drawing/2014/main" id="{6C2B3FA5-2985-EAFB-8885-6820D4058AF4}"/>
-              </a:ext>
-            </a:extLst>
-          </p:cNvPr>
-          <p:cNvSpPr>
-            <a:spLocks noGrp="1"/>
-          </p:cNvSpPr>
-          <p:nvPr>
-            <p:ph sz="half" idx="1"/>
-          </p:nvPr>
-        </p:nvSpPr>
-        <p:spPr>
-          <a:xfrm>
-            <a:off x="862584" y="1574655"/>
-            <a:ext cx="2228642" cy="501939"/>
-          </a:xfrm>
-        </p:spPr>
-        <p:txBody>
-          <a:bodyPr/>
-          <a:lstStyle/>
-          <a:p>
-            <a:pPr marL="0" indent="0">
-              <a:buNone/>
-            </a:pPr>
-            <a:r>
-              <a:rPr lang="en-US" dirty="0"/>
-              <a:t>Current Year</a:t>
-            </a:r>
-          </a:p>
-        </p:txBody>
-      </p:sp>
-      <p:sp>
-        <p:nvSpPr>
-          <p:cNvPr id="4" name="Content Placeholder 3">
-            <a:extLst>
-              <a:ext uri="{FF2B5EF4-FFF2-40B4-BE49-F238E27FC236}">
-                <a16:creationId xmlns:a16="http://schemas.microsoft.com/office/drawing/2014/main" id="{30E0AA0B-A66B-F896-65D9-69DDA700D8E7}"/>
-              </a:ext>
-            </a:extLst>
-          </p:cNvPr>
-          <p:cNvSpPr>
-            <a:spLocks noGrp="1"/>
-          </p:cNvSpPr>
-          <p:nvPr>
-            <p:ph sz="half" idx="2"/>
-          </p:nvPr>
-        </p:nvSpPr>
-        <p:spPr>
-          <a:xfrm>
-            <a:off x="6172200" y="1574654"/>
-            <a:ext cx="1758142" cy="501939"/>
-          </a:xfrm>
-        </p:spPr>
-        <p:txBody>
-          <a:bodyPr/>
-          <a:lstStyle/>
-          <a:p>
-            <a:pPr marL="0" indent="0">
-              <a:buNone/>
-            </a:pPr>
-            <a:r>
-              <a:rPr lang="en-US" dirty="0"/>
-              <a:t>Next Year</a:t>
-            </a:r>
-          </a:p>
-        </p:txBody>
-      </p:sp>
-      <p:pic>
-        <p:nvPicPr>
-          <p:cNvPr id="5" name="Picture 4" descr="db_current.png"/>
-          <p:cNvPicPr>
-            <a:picLocks noChangeAspect="1"/>
-          </p:cNvPicPr>
-          <p:nvPr/>
-        </p:nvPicPr>
-        <p:blipFill>
-          <a:blip r:embed="rId3"/>
-          <a:stretch>
-            <a:fillRect/>
-          </a:stretch>
-        </p:blipFill>
-        <p:spPr>
-          <a:xfrm>
-            <a:off x="862584" y="2076593"/>
-            <a:ext cx="5233416" cy="3670301"/>
-          </a:xfrm>
-          <a:prstGeom prst="rect">
-            <a:avLst/>
-          </a:prstGeom>
-        </p:spPr>
-      </p:pic>
-      <p:pic>
-        <p:nvPicPr>
-          <p:cNvPr id="6" name="Picture 5" descr="db_future.png"/>
-          <p:cNvPicPr>
-            <a:picLocks noChangeAspect="1"/>
-          </p:cNvPicPr>
-          <p:nvPr/>
-        </p:nvPicPr>
-        <p:blipFill>
-          <a:blip r:embed="rId4"/>
-          <a:stretch>
-            <a:fillRect/>
-          </a:stretch>
-        </p:blipFill>
-        <p:spPr>
-          <a:xfrm>
-            <a:off x="6096000" y="2076592"/>
-            <a:ext cx="5509846" cy="3670301"/>
-          </a:xfrm>
-          <a:prstGeom prst="rect">
-            <a:avLst/>
-          </a:prstGeom>
-        </p:spPr>
-      </p:pic>
-    </p:spTree>
-    <p:custDataLst>
-      <p:tags r:id="rId1"/>
-    </p:custDataLst>
-    <p:extLst>
-      <p:ext uri="{BB962C8B-B14F-4D97-AF65-F5344CB8AC3E}">
-        <p14:creationId xmlns:p14="http://schemas.microsoft.com/office/powerpoint/2010/main" val="1502887446"/>
       </p:ext>
     </p:extLst>
   </p:cSld>
@@ -17566,6 +17576,15 @@
 </file>
 
 <file path=customXml/item1.xml><?xml version="1.0" encoding="utf-8"?>
+<?mso-contentType ?>
+<FormTemplates xmlns="http://schemas.microsoft.com/sharepoint/v3/contenttype/forms">
+  <Display>DocumentLibraryForm</Display>
+  <Edit>DocumentLibraryForm</Edit>
+  <New>DocumentLibraryForm</New>
+</FormTemplates>
+</file>
+
+<file path=customXml/item2.xml><?xml version="1.0" encoding="utf-8"?>
 <p:properties xmlns:p="http://schemas.microsoft.com/office/2006/metadata/properties" xmlns:xsi="http://www.w3.org/2001/XMLSchema-instance" xmlns:pc="http://schemas.microsoft.com/office/infopath/2007/PartnerControls">
   <documentManagement>
     <lcf76f155ced4ddcb4097134ff3c332f xmlns="155be751-a274-42e8-93fb-f39d3b9bccc8">
@@ -17575,15 +17594,6 @@
     <AWBlink xmlns="155be751-a274-42e8-93fb-f39d3b9bccc8" xsi:nil="true"/>
   </documentManagement>
 </p:properties>
-</file>
-
-<file path=customXml/item2.xml><?xml version="1.0" encoding="utf-8"?>
-<?mso-contentType ?>
-<FormTemplates xmlns="http://schemas.microsoft.com/sharepoint/v3/contenttype/forms">
-  <Display>DocumentLibraryForm</Display>
-  <Edit>DocumentLibraryForm</Edit>
-  <New>DocumentLibraryForm</New>
-</FormTemplates>
 </file>
 
 <file path=customXml/item3.xml><?xml version="1.0" encoding="utf-8"?>
@@ -17844,6 +17854,14 @@
 </file>
 
 <file path=customXml/itemProps1.xml><?xml version="1.0" encoding="utf-8"?>
+<ds:datastoreItem xmlns:ds="http://schemas.openxmlformats.org/officeDocument/2006/customXml" ds:itemID="{7EFDA260-DDA0-422C-B7AE-778F653FBB36}">
+  <ds:schemaRefs>
+    <ds:schemaRef ds:uri="http://schemas.microsoft.com/sharepoint/v3/contenttype/forms"/>
+  </ds:schemaRefs>
+</ds:datastoreItem>
+</file>
+
+<file path=customXml/itemProps2.xml><?xml version="1.0" encoding="utf-8"?>
 <ds:datastoreItem xmlns:ds="http://schemas.openxmlformats.org/officeDocument/2006/customXml" ds:itemID="{54DA07C5-A406-4A0D-B3E6-3856C94AC7F3}">
   <ds:schemaRefs>
     <ds:schemaRef ds:uri="http://www.w3.org/XML/1998/namespace"/>
@@ -17856,14 +17874,6 @@
     <ds:schemaRef ds:uri="http://schemas.microsoft.com/office/2006/metadata/properties"/>
     <ds:schemaRef ds:uri="http://schemas.microsoft.com/office/infopath/2007/PartnerControls"/>
     <ds:schemaRef ds:uri="http://purl.org/dc/elements/1.1/"/>
-  </ds:schemaRefs>
-</ds:datastoreItem>
-</file>
-
-<file path=customXml/itemProps2.xml><?xml version="1.0" encoding="utf-8"?>
-<ds:datastoreItem xmlns:ds="http://schemas.openxmlformats.org/officeDocument/2006/customXml" ds:itemID="{7EFDA260-DDA0-422C-B7AE-778F653FBB36}">
-  <ds:schemaRefs>
-    <ds:schemaRef ds:uri="http://schemas.microsoft.com/sharepoint/v3/contenttype/forms"/>
   </ds:schemaRefs>
 </ds:datastoreItem>
 </file>
